--- a/DATA604/Project/Team Energy Video Presentation_vjoao.pptx
+++ b/DATA604/Project/Team Energy Video Presentation_vjoao.pptx
@@ -5,7 +5,7 @@
     <p:sldMasterId id="2147483648" r:id="rId4"/>
   </p:sldMasterIdLst>
   <p:notesMasterIdLst>
-    <p:notesMasterId r:id="rId19"/>
+    <p:notesMasterId r:id="rId21"/>
   </p:notesMasterIdLst>
   <p:sldIdLst>
     <p:sldId id="256" r:id="rId5"/>
@@ -14,14 +14,16 @@
     <p:sldId id="259" r:id="rId8"/>
     <p:sldId id="266" r:id="rId9"/>
     <p:sldId id="267" r:id="rId10"/>
-    <p:sldId id="268" r:id="rId11"/>
-    <p:sldId id="269" r:id="rId12"/>
-    <p:sldId id="265" r:id="rId13"/>
-    <p:sldId id="260" r:id="rId14"/>
-    <p:sldId id="261" r:id="rId15"/>
-    <p:sldId id="262" r:id="rId16"/>
-    <p:sldId id="263" r:id="rId17"/>
-    <p:sldId id="264" r:id="rId18"/>
+    <p:sldId id="270" r:id="rId11"/>
+    <p:sldId id="271" r:id="rId12"/>
+    <p:sldId id="268" r:id="rId13"/>
+    <p:sldId id="269" r:id="rId14"/>
+    <p:sldId id="265" r:id="rId15"/>
+    <p:sldId id="260" r:id="rId16"/>
+    <p:sldId id="261" r:id="rId17"/>
+    <p:sldId id="262" r:id="rId18"/>
+    <p:sldId id="263" r:id="rId19"/>
+    <p:sldId id="264" r:id="rId20"/>
   </p:sldIdLst>
   <p:sldSz cx="12192000" cy="6858000"/>
   <p:notesSz cx="6858000" cy="9144000"/>
@@ -142,6 +144,8 @@
           <p14:sldIdLst>
             <p14:sldId id="266"/>
             <p14:sldId id="267"/>
+            <p14:sldId id="270"/>
+            <p14:sldId id="271"/>
           </p14:sldIdLst>
         </p14:section>
         <p14:section name="Jeremy" id="{FBBD1CD5-9551-4453-A5FF-4C251DE8DBD7}">
@@ -193,6 +197,145 @@
     <p1510:client id="{867D6758-E00D-441F-8B1D-675252661ABA}" v="20" dt="2025-03-26T01:23:53.769"/>
   </p1510:revLst>
 </p1510:revInfo>
+</file>
+
+<file path=ppt/changesInfos/changesInfo1.xml><?xml version="1.0" encoding="utf-8"?>
+<pc:chgInfo xmlns:a="http://schemas.openxmlformats.org/drawingml/2006/main" xmlns:r="http://schemas.openxmlformats.org/officeDocument/2006/relationships" xmlns:ac="http://schemas.microsoft.com/office/drawing/2013/main/command" xmlns:pc="http://schemas.microsoft.com/office/powerpoint/2013/main/command">
+  <pc:docChgLst>
+    <pc:chgData name="Gautham Nagaraj" userId="42582a7dfd2e08c3" providerId="LiveId" clId="{34D91838-13E3-4198-A9DC-068FB8D3923A}"/>
+    <pc:docChg chg="undo custSel addSld modSld modSection">
+      <pc:chgData name="Gautham Nagaraj" userId="42582a7dfd2e08c3" providerId="LiveId" clId="{34D91838-13E3-4198-A9DC-068FB8D3923A}" dt="2025-03-26T21:30:53.157" v="327" actId="14100"/>
+      <pc:docMkLst>
+        <pc:docMk/>
+      </pc:docMkLst>
+      <pc:sldChg chg="addSp delSp modSp mod">
+        <pc:chgData name="Gautham Nagaraj" userId="42582a7dfd2e08c3" providerId="LiveId" clId="{34D91838-13E3-4198-A9DC-068FB8D3923A}" dt="2025-03-26T20:10:17.608" v="4" actId="1076"/>
+        <pc:sldMkLst>
+          <pc:docMk/>
+          <pc:sldMk cId="2670562210" sldId="267"/>
+        </pc:sldMkLst>
+        <pc:picChg chg="del">
+          <ac:chgData name="Gautham Nagaraj" userId="42582a7dfd2e08c3" providerId="LiveId" clId="{34D91838-13E3-4198-A9DC-068FB8D3923A}" dt="2025-03-26T20:10:09.221" v="0" actId="478"/>
+          <ac:picMkLst>
+            <pc:docMk/>
+            <pc:sldMk cId="2670562210" sldId="267"/>
+            <ac:picMk id="6" creationId="{1B4E3A50-80E6-6BF5-4E1B-0B5301EA9F8C}"/>
+          </ac:picMkLst>
+        </pc:picChg>
+        <pc:picChg chg="add mod">
+          <ac:chgData name="Gautham Nagaraj" userId="42582a7dfd2e08c3" providerId="LiveId" clId="{34D91838-13E3-4198-A9DC-068FB8D3923A}" dt="2025-03-26T20:10:17.608" v="4" actId="1076"/>
+          <ac:picMkLst>
+            <pc:docMk/>
+            <pc:sldMk cId="2670562210" sldId="267"/>
+            <ac:picMk id="7" creationId="{E9A4D5CE-6640-9F2E-7605-E4ADE5D5967F}"/>
+          </ac:picMkLst>
+        </pc:picChg>
+      </pc:sldChg>
+      <pc:sldChg chg="addSp delSp modSp new mod">
+        <pc:chgData name="Gautham Nagaraj" userId="42582a7dfd2e08c3" providerId="LiveId" clId="{34D91838-13E3-4198-A9DC-068FB8D3923A}" dt="2025-03-26T21:30:30.127" v="323" actId="1076"/>
+        <pc:sldMkLst>
+          <pc:docMk/>
+          <pc:sldMk cId="3698844861" sldId="270"/>
+        </pc:sldMkLst>
+        <pc:spChg chg="mod">
+          <ac:chgData name="Gautham Nagaraj" userId="42582a7dfd2e08c3" providerId="LiveId" clId="{34D91838-13E3-4198-A9DC-068FB8D3923A}" dt="2025-03-26T21:15:06.809" v="71" actId="20577"/>
+          <ac:spMkLst>
+            <pc:docMk/>
+            <pc:sldMk cId="3698844861" sldId="270"/>
+            <ac:spMk id="2" creationId="{0E6A89D0-CCAF-3AC6-9CAE-4B4291FDE7F1}"/>
+          </ac:spMkLst>
+        </pc:spChg>
+        <pc:spChg chg="mod">
+          <ac:chgData name="Gautham Nagaraj" userId="42582a7dfd2e08c3" providerId="LiveId" clId="{34D91838-13E3-4198-A9DC-068FB8D3923A}" dt="2025-03-26T21:16:48.066" v="257" actId="14100"/>
+          <ac:spMkLst>
+            <pc:docMk/>
+            <pc:sldMk cId="3698844861" sldId="270"/>
+            <ac:spMk id="3" creationId="{36B4140C-EDCF-1343-0E39-BE1B5A04CDCF}"/>
+          </ac:spMkLst>
+        </pc:spChg>
+        <pc:picChg chg="add del mod">
+          <ac:chgData name="Gautham Nagaraj" userId="42582a7dfd2e08c3" providerId="LiveId" clId="{34D91838-13E3-4198-A9DC-068FB8D3923A}" dt="2025-03-26T21:26:14.378" v="264" actId="478"/>
+          <ac:picMkLst>
+            <pc:docMk/>
+            <pc:sldMk cId="3698844861" sldId="270"/>
+            <ac:picMk id="6" creationId="{ECA55F64-4949-8FB7-ACCC-49CA88192E89}"/>
+          </ac:picMkLst>
+        </pc:picChg>
+        <pc:picChg chg="add del mod">
+          <ac:chgData name="Gautham Nagaraj" userId="42582a7dfd2e08c3" providerId="LiveId" clId="{34D91838-13E3-4198-A9DC-068FB8D3923A}" dt="2025-03-26T21:26:56.565" v="269" actId="478"/>
+          <ac:picMkLst>
+            <pc:docMk/>
+            <pc:sldMk cId="3698844861" sldId="270"/>
+            <ac:picMk id="8" creationId="{07509399-742D-5723-208E-0B61B7C316B6}"/>
+          </ac:picMkLst>
+        </pc:picChg>
+        <pc:picChg chg="add mod">
+          <ac:chgData name="Gautham Nagaraj" userId="42582a7dfd2e08c3" providerId="LiveId" clId="{34D91838-13E3-4198-A9DC-068FB8D3923A}" dt="2025-03-26T21:30:27.241" v="322" actId="1076"/>
+          <ac:picMkLst>
+            <pc:docMk/>
+            <pc:sldMk cId="3698844861" sldId="270"/>
+            <ac:picMk id="10" creationId="{63B84E74-17D5-1800-4DB5-E42B352E1BF1}"/>
+          </ac:picMkLst>
+        </pc:picChg>
+        <pc:picChg chg="add del mod">
+          <ac:chgData name="Gautham Nagaraj" userId="42582a7dfd2e08c3" providerId="LiveId" clId="{34D91838-13E3-4198-A9DC-068FB8D3923A}" dt="2025-03-26T21:27:23.902" v="278" actId="478"/>
+          <ac:picMkLst>
+            <pc:docMk/>
+            <pc:sldMk cId="3698844861" sldId="270"/>
+            <ac:picMk id="12" creationId="{175098C2-1FA2-7643-5EA0-331F12F1D357}"/>
+          </ac:picMkLst>
+        </pc:picChg>
+        <pc:picChg chg="add mod">
+          <ac:chgData name="Gautham Nagaraj" userId="42582a7dfd2e08c3" providerId="LiveId" clId="{34D91838-13E3-4198-A9DC-068FB8D3923A}" dt="2025-03-26T21:30:30.127" v="323" actId="1076"/>
+          <ac:picMkLst>
+            <pc:docMk/>
+            <pc:sldMk cId="3698844861" sldId="270"/>
+            <ac:picMk id="14" creationId="{7613496D-0716-B2A4-F04E-72F14CF3E230}"/>
+          </ac:picMkLst>
+        </pc:picChg>
+      </pc:sldChg>
+      <pc:sldChg chg="addSp delSp modSp new mod">
+        <pc:chgData name="Gautham Nagaraj" userId="42582a7dfd2e08c3" providerId="LiveId" clId="{34D91838-13E3-4198-A9DC-068FB8D3923A}" dt="2025-03-26T21:30:53.157" v="327" actId="14100"/>
+        <pc:sldMkLst>
+          <pc:docMk/>
+          <pc:sldMk cId="1560842493" sldId="271"/>
+        </pc:sldMkLst>
+        <pc:spChg chg="del">
+          <ac:chgData name="Gautham Nagaraj" userId="42582a7dfd2e08c3" providerId="LiveId" clId="{34D91838-13E3-4198-A9DC-068FB8D3923A}" dt="2025-03-26T21:28:26.113" v="285" actId="21"/>
+          <ac:spMkLst>
+            <pc:docMk/>
+            <pc:sldMk cId="1560842493" sldId="271"/>
+            <ac:spMk id="2" creationId="{E3755BCC-5604-042A-0D05-4CEE6D3B67DF}"/>
+          </ac:spMkLst>
+        </pc:spChg>
+        <pc:spChg chg="mod">
+          <ac:chgData name="Gautham Nagaraj" userId="42582a7dfd2e08c3" providerId="LiveId" clId="{34D91838-13E3-4198-A9DC-068FB8D3923A}" dt="2025-03-26T21:30:53.157" v="327" actId="14100"/>
+          <ac:spMkLst>
+            <pc:docMk/>
+            <pc:sldMk cId="1560842493" sldId="271"/>
+            <ac:spMk id="3" creationId="{C1FF88E1-CB52-DC51-5790-CC2523E6F725}"/>
+          </ac:spMkLst>
+        </pc:spChg>
+        <pc:picChg chg="add mod">
+          <ac:chgData name="Gautham Nagaraj" userId="42582a7dfd2e08c3" providerId="LiveId" clId="{34D91838-13E3-4198-A9DC-068FB8D3923A}" dt="2025-03-26T21:30:40.191" v="326" actId="1076"/>
+          <ac:picMkLst>
+            <pc:docMk/>
+            <pc:sldMk cId="1560842493" sldId="271"/>
+            <ac:picMk id="6" creationId="{FD9B2CE3-9BE5-5798-4A55-0B03405A4163}"/>
+          </ac:picMkLst>
+        </pc:picChg>
+        <pc:picChg chg="add mod">
+          <ac:chgData name="Gautham Nagaraj" userId="42582a7dfd2e08c3" providerId="LiveId" clId="{34D91838-13E3-4198-A9DC-068FB8D3923A}" dt="2025-03-26T21:30:37.962" v="325" actId="1076"/>
+          <ac:picMkLst>
+            <pc:docMk/>
+            <pc:sldMk cId="1560842493" sldId="271"/>
+            <ac:picMk id="8" creationId="{4CF35AC5-649F-B75B-95D9-5F651DF7CE34}"/>
+          </ac:picMkLst>
+        </pc:picChg>
+      </pc:sldChg>
+    </pc:docChg>
+  </pc:docChgLst>
+</pc:chgInfo>
 </file>
 
 <file path=ppt/charts/chart1.xml><?xml version="1.0" encoding="utf-8"?>
@@ -4722,7 +4865,7 @@
           <a:p>
             <a:fld id="{4B2CACE1-0839-DD4E-8A8D-815B08AED9A4}" type="datetimeFigureOut">
               <a:rPr lang="en-US" smtClean="0"/>
-              <a:t>2025-03-26</a:t>
+              <a:t>3/26/2025</a:t>
             </a:fld>
             <a:endParaRPr lang="en-US"/>
           </a:p>
@@ -7249,2158 +7392,6 @@
   <p:cSld>
     <p:spTree>
       <p:nvGrpSpPr>
-        <p:cNvPr id="1" name=""/>
-        <p:cNvGrpSpPr/>
-        <p:nvPr/>
-      </p:nvGrpSpPr>
-      <p:grpSpPr>
-        <a:xfrm>
-          <a:off x="0" y="0"/>
-          <a:ext cx="0" cy="0"/>
-          <a:chOff x="0" y="0"/>
-          <a:chExt cx="0" cy="0"/>
-        </a:xfrm>
-      </p:grpSpPr>
-      <p:sp>
-        <p:nvSpPr>
-          <p:cNvPr id="2" name="Title 1">
-            <a:extLst>
-              <a:ext uri="{FF2B5EF4-FFF2-40B4-BE49-F238E27FC236}">
-                <a16:creationId xmlns:a16="http://schemas.microsoft.com/office/drawing/2014/main" id="{4C48F3D9-632A-4572-7B67-691790442369}"/>
-              </a:ext>
-            </a:extLst>
-          </p:cNvPr>
-          <p:cNvSpPr>
-            <a:spLocks noGrp="1"/>
-          </p:cNvSpPr>
-          <p:nvPr>
-            <p:ph type="title"/>
-          </p:nvPr>
-        </p:nvSpPr>
-        <p:spPr/>
-        <p:txBody>
-          <a:bodyPr>
-            <a:normAutofit fontScale="90000"/>
-          </a:bodyPr>
-          <a:lstStyle/>
-          <a:p>
-            <a:r>
-              <a:rPr lang="en-US" dirty="0"/>
-              <a:t>What are the different energy generation sources?	</a:t>
-            </a:r>
-            <a:endParaRPr lang="en-IN" dirty="0"/>
-          </a:p>
-        </p:txBody>
-      </p:sp>
-      <p:sp>
-        <p:nvSpPr>
-          <p:cNvPr id="3" name="Content Placeholder 2">
-            <a:extLst>
-              <a:ext uri="{FF2B5EF4-FFF2-40B4-BE49-F238E27FC236}">
-                <a16:creationId xmlns:a16="http://schemas.microsoft.com/office/drawing/2014/main" id="{1E250616-F6CA-6D9D-0300-7150613BA91A}"/>
-              </a:ext>
-            </a:extLst>
-          </p:cNvPr>
-          <p:cNvSpPr>
-            <a:spLocks noGrp="1"/>
-          </p:cNvSpPr>
-          <p:nvPr>
-            <p:ph idx="1"/>
-          </p:nvPr>
-        </p:nvSpPr>
-        <p:spPr>
-          <a:xfrm>
-            <a:off x="334028" y="1634229"/>
-            <a:ext cx="4914628" cy="4115669"/>
-          </a:xfrm>
-        </p:spPr>
-        <p:txBody>
-          <a:bodyPr/>
-          <a:lstStyle/>
-          <a:p>
-            <a:pPr algn="just">
-              <a:lnSpc>
-                <a:spcPct val="100000"/>
-              </a:lnSpc>
-              <a:spcAft>
-                <a:spcPts val="1000"/>
-              </a:spcAft>
-            </a:pPr>
-            <a:r>
-              <a:rPr lang="en-US" sz="1800" b="0" i="0" dirty="0">
-                <a:effectLst/>
-                <a:latin typeface="system-ui"/>
-              </a:rPr>
-              <a:t>Generation sources include </a:t>
-            </a:r>
-            <a:r>
-              <a:rPr lang="en-US" sz="1800" b="1" i="0" dirty="0">
-                <a:effectLst/>
-                <a:latin typeface="system-ui"/>
-              </a:rPr>
-              <a:t>natural gas plants </a:t>
-            </a:r>
-            <a:r>
-              <a:rPr lang="en-US" sz="1800" b="0" i="0" dirty="0">
-                <a:effectLst/>
-                <a:latin typeface="system-ui"/>
-              </a:rPr>
-              <a:t>(simple, combined or cogeneration cycles), </a:t>
-            </a:r>
-            <a:r>
-              <a:rPr lang="en-US" sz="1800" b="1" i="0" dirty="0">
-                <a:effectLst/>
-                <a:latin typeface="system-ui"/>
-              </a:rPr>
-              <a:t>wind farms, solar farms</a:t>
-            </a:r>
-            <a:r>
-              <a:rPr lang="en-US" sz="1800" b="0" i="0" dirty="0">
-                <a:effectLst/>
-                <a:latin typeface="system-ui"/>
-              </a:rPr>
-              <a:t>, among others.</a:t>
-            </a:r>
-          </a:p>
-          <a:p>
-            <a:pPr algn="just">
-              <a:lnSpc>
-                <a:spcPct val="100000"/>
-              </a:lnSpc>
-              <a:spcAft>
-                <a:spcPts val="1000"/>
-              </a:spcAft>
-            </a:pPr>
-            <a:r>
-              <a:rPr lang="en-US" sz="1800" dirty="0">
-                <a:latin typeface="system-ui"/>
-              </a:rPr>
-              <a:t>Over the past years, green sources such as Wind and Solar have been gaining momentum, but </a:t>
-            </a:r>
-            <a:r>
-              <a:rPr lang="en-US" sz="1800" b="1" dirty="0">
-                <a:latin typeface="system-ui"/>
-              </a:rPr>
-              <a:t>Cogeneration still owns the largest share.</a:t>
-            </a:r>
-            <a:endParaRPr lang="en-US" sz="1800" b="1" i="0" dirty="0">
-              <a:effectLst/>
-              <a:latin typeface="system-ui"/>
-            </a:endParaRPr>
-          </a:p>
-          <a:p>
-            <a:pPr algn="just"/>
-            <a:r>
-              <a:rPr lang="en-IN" sz="1800" b="1" dirty="0"/>
-              <a:t>Natural Gas plants </a:t>
-            </a:r>
-            <a:r>
-              <a:rPr lang="en-IN" sz="1800" dirty="0"/>
-              <a:t>are responsible for almost ¾ of total generation.</a:t>
-            </a:r>
-          </a:p>
-          <a:p>
-            <a:pPr algn="just"/>
-            <a:r>
-              <a:rPr lang="en-IN" sz="1800" b="1" dirty="0"/>
-              <a:t>Coal was rapidly phased out </a:t>
-            </a:r>
-            <a:r>
-              <a:rPr lang="en-IN" sz="1800" dirty="0"/>
-              <a:t>(from 32% in 2015 to 2% in 2024)</a:t>
-            </a:r>
-          </a:p>
-        </p:txBody>
-      </p:sp>
-      <p:sp>
-        <p:nvSpPr>
-          <p:cNvPr id="4" name="Slide Number Placeholder 3">
-            <a:extLst>
-              <a:ext uri="{FF2B5EF4-FFF2-40B4-BE49-F238E27FC236}">
-                <a16:creationId xmlns:a16="http://schemas.microsoft.com/office/drawing/2014/main" id="{CB58AD21-9246-FAED-ABF6-D4A8CF6E3127}"/>
-              </a:ext>
-            </a:extLst>
-          </p:cNvPr>
-          <p:cNvSpPr>
-            <a:spLocks noGrp="1"/>
-          </p:cNvSpPr>
-          <p:nvPr>
-            <p:ph type="sldNum" sz="quarter" idx="12"/>
-          </p:nvPr>
-        </p:nvSpPr>
-        <p:spPr/>
-        <p:txBody>
-          <a:bodyPr/>
-          <a:lstStyle/>
-          <a:p>
-            <a:fld id="{5C35FCF4-C3EF-BD43-82E0-05BC237DAD2A}" type="slidenum">
-              <a:rPr lang="en-US" smtClean="0"/>
-              <a:pPr/>
-              <a:t>10</a:t>
-            </a:fld>
-            <a:endParaRPr lang="en-US" dirty="0"/>
-          </a:p>
-        </p:txBody>
-      </p:sp>
-      <p:graphicFrame>
-        <p:nvGraphicFramePr>
-          <p:cNvPr id="7" name="Chart 6">
-            <a:extLst>
-              <a:ext uri="{FF2B5EF4-FFF2-40B4-BE49-F238E27FC236}">
-                <a16:creationId xmlns:a16="http://schemas.microsoft.com/office/drawing/2014/main" id="{DF8ED046-7DE7-B2C6-71C8-928D5924758E}"/>
-              </a:ext>
-            </a:extLst>
-          </p:cNvPr>
-          <p:cNvGraphicFramePr>
-            <a:graphicFrameLocks/>
-          </p:cNvGraphicFramePr>
-          <p:nvPr>
-            <p:extLst>
-              <p:ext uri="{D42A27DB-BD31-4B8C-83A1-F6EECF244321}">
-                <p14:modId xmlns:p14="http://schemas.microsoft.com/office/powerpoint/2010/main" val="2621695995"/>
-              </p:ext>
-            </p:extLst>
-          </p:nvPr>
-        </p:nvGraphicFramePr>
-        <p:xfrm>
-          <a:off x="5558931" y="2320463"/>
-          <a:ext cx="6385560" cy="2743200"/>
-        </p:xfrm>
-        <a:graphic>
-          <a:graphicData uri="http://schemas.openxmlformats.org/drawingml/2006/chart">
-            <c:chart xmlns:c="http://schemas.openxmlformats.org/drawingml/2006/chart" xmlns:r="http://schemas.openxmlformats.org/officeDocument/2006/relationships" r:id="rId2"/>
-          </a:graphicData>
-        </a:graphic>
-      </p:graphicFrame>
-    </p:spTree>
-    <p:extLst>
-      <p:ext uri="{BB962C8B-B14F-4D97-AF65-F5344CB8AC3E}">
-        <p14:creationId xmlns:p14="http://schemas.microsoft.com/office/powerpoint/2010/main" val="691535690"/>
-      </p:ext>
-    </p:extLst>
-  </p:cSld>
-  <p:clrMapOvr>
-    <a:masterClrMapping/>
-  </p:clrMapOvr>
-</p:sld>
-</file>
-
-<file path=ppt/slides/slide11.xml><?xml version="1.0" encoding="utf-8"?>
-<p:sld xmlns:a="http://schemas.openxmlformats.org/drawingml/2006/main" xmlns:r="http://schemas.openxmlformats.org/officeDocument/2006/relationships" xmlns:p="http://schemas.openxmlformats.org/presentationml/2006/main" show="0">
-  <p:cSld>
-    <p:spTree>
-      <p:nvGrpSpPr>
-        <p:cNvPr id="1" name=""/>
-        <p:cNvGrpSpPr/>
-        <p:nvPr/>
-      </p:nvGrpSpPr>
-      <p:grpSpPr>
-        <a:xfrm>
-          <a:off x="0" y="0"/>
-          <a:ext cx="0" cy="0"/>
-          <a:chOff x="0" y="0"/>
-          <a:chExt cx="0" cy="0"/>
-        </a:xfrm>
-      </p:grpSpPr>
-      <p:sp>
-        <p:nvSpPr>
-          <p:cNvPr id="2" name="Title 1">
-            <a:extLst>
-              <a:ext uri="{FF2B5EF4-FFF2-40B4-BE49-F238E27FC236}">
-                <a16:creationId xmlns:a16="http://schemas.microsoft.com/office/drawing/2014/main" id="{1A5B58A0-C0D0-59C3-469C-A33F5AAA8312}"/>
-              </a:ext>
-            </a:extLst>
-          </p:cNvPr>
-          <p:cNvSpPr>
-            <a:spLocks noGrp="1"/>
-          </p:cNvSpPr>
-          <p:nvPr>
-            <p:ph type="title"/>
-          </p:nvPr>
-        </p:nvSpPr>
-        <p:spPr/>
-        <p:txBody>
-          <a:bodyPr/>
-          <a:lstStyle/>
-          <a:p>
-            <a:r>
-              <a:rPr lang="en-US" dirty="0"/>
-              <a:t>The Datasets</a:t>
-            </a:r>
-            <a:endParaRPr lang="en-IN" dirty="0"/>
-          </a:p>
-        </p:txBody>
-      </p:sp>
-      <p:sp>
-        <p:nvSpPr>
-          <p:cNvPr id="3" name="Content Placeholder 2">
-            <a:extLst>
-              <a:ext uri="{FF2B5EF4-FFF2-40B4-BE49-F238E27FC236}">
-                <a16:creationId xmlns:a16="http://schemas.microsoft.com/office/drawing/2014/main" id="{6E1284D0-56B0-247B-E853-9F755AF7D4FD}"/>
-              </a:ext>
-            </a:extLst>
-          </p:cNvPr>
-          <p:cNvSpPr>
-            <a:spLocks noGrp="1"/>
-          </p:cNvSpPr>
-          <p:nvPr>
-            <p:ph idx="1"/>
-          </p:nvPr>
-        </p:nvSpPr>
-        <p:spPr/>
-        <p:txBody>
-          <a:bodyPr/>
-          <a:lstStyle/>
-          <a:p>
-            <a:pPr marL="0" indent="0">
-              <a:buNone/>
-            </a:pPr>
-            <a:endParaRPr lang="en-US" dirty="0"/>
-          </a:p>
-          <a:p>
-            <a:endParaRPr lang="en-IN" dirty="0"/>
-          </a:p>
-        </p:txBody>
-      </p:sp>
-      <p:sp>
-        <p:nvSpPr>
-          <p:cNvPr id="4" name="Slide Number Placeholder 3">
-            <a:extLst>
-              <a:ext uri="{FF2B5EF4-FFF2-40B4-BE49-F238E27FC236}">
-                <a16:creationId xmlns:a16="http://schemas.microsoft.com/office/drawing/2014/main" id="{C6A15AAA-0CD0-F9C6-7C80-DC730EB0A004}"/>
-              </a:ext>
-            </a:extLst>
-          </p:cNvPr>
-          <p:cNvSpPr>
-            <a:spLocks noGrp="1"/>
-          </p:cNvSpPr>
-          <p:nvPr>
-            <p:ph type="sldNum" sz="quarter" idx="12"/>
-          </p:nvPr>
-        </p:nvSpPr>
-        <p:spPr/>
-        <p:txBody>
-          <a:bodyPr/>
-          <a:lstStyle/>
-          <a:p>
-            <a:fld id="{5C35FCF4-C3EF-BD43-82E0-05BC237DAD2A}" type="slidenum">
-              <a:rPr lang="en-US" smtClean="0"/>
-              <a:pPr/>
-              <a:t>11</a:t>
-            </a:fld>
-            <a:endParaRPr lang="en-US" dirty="0"/>
-          </a:p>
-        </p:txBody>
-      </p:sp>
-      <p:graphicFrame>
-        <p:nvGraphicFramePr>
-          <p:cNvPr id="7" name="Diagram 6">
-            <a:extLst>
-              <a:ext uri="{FF2B5EF4-FFF2-40B4-BE49-F238E27FC236}">
-                <a16:creationId xmlns:a16="http://schemas.microsoft.com/office/drawing/2014/main" id="{84D7C596-CBB8-AF14-38B2-574468B34F80}"/>
-              </a:ext>
-            </a:extLst>
-          </p:cNvPr>
-          <p:cNvGraphicFramePr/>
-          <p:nvPr>
-            <p:extLst>
-              <p:ext uri="{D42A27DB-BD31-4B8C-83A1-F6EECF244321}">
-                <p14:modId xmlns:p14="http://schemas.microsoft.com/office/powerpoint/2010/main" val="3257354709"/>
-              </p:ext>
-            </p:extLst>
-          </p:nvPr>
-        </p:nvGraphicFramePr>
-        <p:xfrm>
-          <a:off x="2032000" y="1628503"/>
-          <a:ext cx="7216503" cy="4509830"/>
-        </p:xfrm>
-        <a:graphic>
-          <a:graphicData uri="http://schemas.openxmlformats.org/drawingml/2006/diagram">
-            <dgm:relIds xmlns:dgm="http://schemas.openxmlformats.org/drawingml/2006/diagram" xmlns:r="http://schemas.openxmlformats.org/officeDocument/2006/relationships" r:dm="rId2" r:lo="rId3" r:qs="rId4" r:cs="rId5"/>
-          </a:graphicData>
-        </a:graphic>
-      </p:graphicFrame>
-    </p:spTree>
-    <p:extLst>
-      <p:ext uri="{BB962C8B-B14F-4D97-AF65-F5344CB8AC3E}">
-        <p14:creationId xmlns:p14="http://schemas.microsoft.com/office/powerpoint/2010/main" val="4275676341"/>
-      </p:ext>
-    </p:extLst>
-  </p:cSld>
-  <p:clrMapOvr>
-    <a:masterClrMapping/>
-  </p:clrMapOvr>
-</p:sld>
-</file>
-
-<file path=ppt/slides/slide12.xml><?xml version="1.0" encoding="utf-8"?>
-<p:sld xmlns:a="http://schemas.openxmlformats.org/drawingml/2006/main" xmlns:r="http://schemas.openxmlformats.org/officeDocument/2006/relationships" xmlns:p="http://schemas.openxmlformats.org/presentationml/2006/main" show="0">
-  <p:cSld>
-    <p:spTree>
-      <p:nvGrpSpPr>
-        <p:cNvPr id="1" name=""/>
-        <p:cNvGrpSpPr/>
-        <p:nvPr/>
-      </p:nvGrpSpPr>
-      <p:grpSpPr>
-        <a:xfrm>
-          <a:off x="0" y="0"/>
-          <a:ext cx="0" cy="0"/>
-          <a:chOff x="0" y="0"/>
-          <a:chExt cx="0" cy="0"/>
-        </a:xfrm>
-      </p:grpSpPr>
-      <p:sp>
-        <p:nvSpPr>
-          <p:cNvPr id="3" name="Content Placeholder 2">
-            <a:extLst>
-              <a:ext uri="{FF2B5EF4-FFF2-40B4-BE49-F238E27FC236}">
-                <a16:creationId xmlns:a16="http://schemas.microsoft.com/office/drawing/2014/main" id="{F703D7B7-61CF-4E04-321E-7E750ADD5AC6}"/>
-              </a:ext>
-            </a:extLst>
-          </p:cNvPr>
-          <p:cNvSpPr>
-            <a:spLocks noGrp="1"/>
-          </p:cNvSpPr>
-          <p:nvPr>
-            <p:ph idx="1"/>
-          </p:nvPr>
-        </p:nvSpPr>
-        <p:spPr>
-          <a:xfrm>
-            <a:off x="562628" y="583475"/>
-            <a:ext cx="9724372" cy="5305390"/>
-          </a:xfrm>
-        </p:spPr>
-        <p:txBody>
-          <a:bodyPr/>
-          <a:lstStyle/>
-          <a:p>
-            <a:r>
-              <a:rPr lang="en-US" sz="2400" dirty="0"/>
-              <a:t>There are total of 5 datasets:  Demand, temperature, gas price, generation and price.</a:t>
-            </a:r>
-          </a:p>
-          <a:p>
-            <a:pPr marL="457200" indent="-457200">
-              <a:buFont typeface="+mj-lt"/>
-              <a:buAutoNum type="arabicPeriod"/>
-            </a:pPr>
-            <a:r>
-              <a:rPr lang="en-US" sz="2400" dirty="0"/>
-              <a:t>Demand Dataset - The demand datasets consists of Alberta’s internal load/Demand consisting of the total hourly demand in MW for the entire Province combined with spot price and gas price</a:t>
-            </a:r>
-          </a:p>
-          <a:p>
-            <a:r>
-              <a:rPr lang="en-US" sz="2400" dirty="0"/>
-              <a:t>Visualizing the demand vs price, we can obtain an understanding of how an increase population increases the price</a:t>
-            </a:r>
-            <a:endParaRPr lang="en-IN" sz="2400" dirty="0"/>
-          </a:p>
-        </p:txBody>
-      </p:sp>
-      <p:sp>
-        <p:nvSpPr>
-          <p:cNvPr id="4" name="Slide Number Placeholder 3">
-            <a:extLst>
-              <a:ext uri="{FF2B5EF4-FFF2-40B4-BE49-F238E27FC236}">
-                <a16:creationId xmlns:a16="http://schemas.microsoft.com/office/drawing/2014/main" id="{684F2A64-15ED-FE2A-F9A7-D98DC7CB7165}"/>
-              </a:ext>
-            </a:extLst>
-          </p:cNvPr>
-          <p:cNvSpPr>
-            <a:spLocks noGrp="1"/>
-          </p:cNvSpPr>
-          <p:nvPr>
-            <p:ph type="sldNum" sz="quarter" idx="12"/>
-          </p:nvPr>
-        </p:nvSpPr>
-        <p:spPr/>
-        <p:txBody>
-          <a:bodyPr/>
-          <a:lstStyle/>
-          <a:p>
-            <a:fld id="{5C35FCF4-C3EF-BD43-82E0-05BC237DAD2A}" type="slidenum">
-              <a:rPr lang="en-US" smtClean="0"/>
-              <a:pPr/>
-              <a:t>12</a:t>
-            </a:fld>
-            <a:endParaRPr lang="en-US" dirty="0"/>
-          </a:p>
-        </p:txBody>
-      </p:sp>
-      <p:pic>
-        <p:nvPicPr>
-          <p:cNvPr id="5" name="Graphic 4" descr="Business Growth with solid fill">
-            <a:extLst>
-              <a:ext uri="{FF2B5EF4-FFF2-40B4-BE49-F238E27FC236}">
-                <a16:creationId xmlns:a16="http://schemas.microsoft.com/office/drawing/2014/main" id="{A11FA293-6C58-A6C9-9C0E-EFDD9A2AE410}"/>
-              </a:ext>
-            </a:extLst>
-          </p:cNvPr>
-          <p:cNvPicPr>
-            <a:picLocks noChangeAspect="1"/>
-          </p:cNvPicPr>
-          <p:nvPr/>
-        </p:nvPicPr>
-        <p:blipFill>
-          <a:blip r:embed="rId2">
-            <a:extLst>
-              <a:ext uri="{96DAC541-7B7A-43D3-8B79-37D633B846F1}">
-                <asvg:svgBlip xmlns:asvg="http://schemas.microsoft.com/office/drawing/2016/SVG/main" r:embed="rId3"/>
-              </a:ext>
-            </a:extLst>
-          </a:blip>
-          <a:stretch>
-            <a:fillRect/>
-          </a:stretch>
-        </p:blipFill>
-        <p:spPr>
-          <a:xfrm>
-            <a:off x="843063" y="3866023"/>
-            <a:ext cx="2094690" cy="2094690"/>
-          </a:xfrm>
-          <a:prstGeom prst="rect">
-            <a:avLst/>
-          </a:prstGeom>
-        </p:spPr>
-      </p:pic>
-      <p:pic>
-        <p:nvPicPr>
-          <p:cNvPr id="7" name="Picture 6">
-            <a:extLst>
-              <a:ext uri="{FF2B5EF4-FFF2-40B4-BE49-F238E27FC236}">
-                <a16:creationId xmlns:a16="http://schemas.microsoft.com/office/drawing/2014/main" id="{9F202C17-CA81-9901-42FE-FFF1A8A449CD}"/>
-              </a:ext>
-            </a:extLst>
-          </p:cNvPr>
-          <p:cNvPicPr>
-            <a:picLocks noChangeAspect="1"/>
-          </p:cNvPicPr>
-          <p:nvPr/>
-        </p:nvPicPr>
-        <p:blipFill>
-          <a:blip r:embed="rId4"/>
-          <a:stretch>
-            <a:fillRect/>
-          </a:stretch>
-        </p:blipFill>
-        <p:spPr>
-          <a:xfrm>
-            <a:off x="3759093" y="3505284"/>
-            <a:ext cx="4217588" cy="2769241"/>
-          </a:xfrm>
-          <a:prstGeom prst="rect">
-            <a:avLst/>
-          </a:prstGeom>
-        </p:spPr>
-      </p:pic>
-    </p:spTree>
-    <p:extLst>
-      <p:ext uri="{BB962C8B-B14F-4D97-AF65-F5344CB8AC3E}">
-        <p14:creationId xmlns:p14="http://schemas.microsoft.com/office/powerpoint/2010/main" val="2990006344"/>
-      </p:ext>
-    </p:extLst>
-  </p:cSld>
-  <p:clrMapOvr>
-    <a:masterClrMapping/>
-  </p:clrMapOvr>
-</p:sld>
-</file>
-
-<file path=ppt/slides/slide13.xml><?xml version="1.0" encoding="utf-8"?>
-<p:sld xmlns:a="http://schemas.openxmlformats.org/drawingml/2006/main" xmlns:r="http://schemas.openxmlformats.org/officeDocument/2006/relationships" xmlns:p="http://schemas.openxmlformats.org/presentationml/2006/main" show="0">
-  <p:cSld>
-    <p:spTree>
-      <p:nvGrpSpPr>
-        <p:cNvPr id="1" name=""/>
-        <p:cNvGrpSpPr/>
-        <p:nvPr/>
-      </p:nvGrpSpPr>
-      <p:grpSpPr>
-        <a:xfrm>
-          <a:off x="0" y="0"/>
-          <a:ext cx="0" cy="0"/>
-          <a:chOff x="0" y="0"/>
-          <a:chExt cx="0" cy="0"/>
-        </a:xfrm>
-      </p:grpSpPr>
-      <p:sp>
-        <p:nvSpPr>
-          <p:cNvPr id="3" name="Content Placeholder 2">
-            <a:extLst>
-              <a:ext uri="{FF2B5EF4-FFF2-40B4-BE49-F238E27FC236}">
-                <a16:creationId xmlns:a16="http://schemas.microsoft.com/office/drawing/2014/main" id="{DA5CC814-B9B7-CAF1-D217-814886060297}"/>
-              </a:ext>
-            </a:extLst>
-          </p:cNvPr>
-          <p:cNvSpPr>
-            <a:spLocks noGrp="1"/>
-          </p:cNvSpPr>
-          <p:nvPr>
-            <p:ph idx="1"/>
-          </p:nvPr>
-        </p:nvSpPr>
-        <p:spPr>
-          <a:xfrm>
-            <a:off x="0" y="252549"/>
-            <a:ext cx="8715983" cy="5895332"/>
-          </a:xfrm>
-        </p:spPr>
-        <p:txBody>
-          <a:bodyPr/>
-          <a:lstStyle/>
-          <a:p>
-            <a:pPr marL="0" indent="0">
-              <a:buNone/>
-            </a:pPr>
-            <a:r>
-              <a:rPr lang="en-US" sz="2400" dirty="0">
-                <a:solidFill>
-                  <a:schemeClr val="accent1">
-                    <a:lumMod val="75000"/>
-                  </a:schemeClr>
-                </a:solidFill>
-              </a:rPr>
-              <a:t>2</a:t>
-            </a:r>
-            <a:r>
-              <a:rPr lang="en-US" sz="2400" dirty="0"/>
-              <a:t>.  Temperature dataset – The temperature</a:t>
-            </a:r>
-          </a:p>
-          <a:p>
-            <a:pPr marL="0" indent="0">
-              <a:buNone/>
-            </a:pPr>
-            <a:r>
-              <a:rPr lang="en-US" sz="2400" dirty="0"/>
-              <a:t>dataset consists of the electricity generated vs </a:t>
-            </a:r>
-          </a:p>
-          <a:p>
-            <a:pPr marL="0" indent="0">
-              <a:buNone/>
-            </a:pPr>
-            <a:r>
-              <a:rPr lang="en-US" sz="2400" dirty="0"/>
-              <a:t>the temperature</a:t>
-            </a:r>
-          </a:p>
-          <a:p>
-            <a:r>
-              <a:rPr lang="en-US" sz="2400" dirty="0"/>
-              <a:t>We can obtain an understanding of how the </a:t>
-            </a:r>
-          </a:p>
-          <a:p>
-            <a:pPr marL="0" indent="0">
-              <a:buNone/>
-            </a:pPr>
-            <a:r>
-              <a:rPr lang="en-US" sz="2400" dirty="0"/>
-              <a:t>rise/fall in temperature increases the</a:t>
-            </a:r>
-          </a:p>
-          <a:p>
-            <a:pPr marL="0" indent="0">
-              <a:buNone/>
-            </a:pPr>
-            <a:r>
-              <a:rPr lang="en-US" sz="2400" dirty="0"/>
-              <a:t>electricity generated/demand</a:t>
-            </a:r>
-          </a:p>
-          <a:p>
-            <a:endParaRPr lang="en-US" sz="2400" dirty="0"/>
-          </a:p>
-          <a:p>
-            <a:pPr marL="0" indent="0">
-              <a:buNone/>
-            </a:pPr>
-            <a:r>
-              <a:rPr lang="en-US" sz="2400" dirty="0">
-                <a:solidFill>
-                  <a:schemeClr val="accent1">
-                    <a:lumMod val="75000"/>
-                  </a:schemeClr>
-                </a:solidFill>
-              </a:rPr>
-              <a:t>3. </a:t>
-            </a:r>
-            <a:r>
-              <a:rPr lang="en-US" sz="2400" dirty="0"/>
-              <a:t>Gas Price – Cogeneration has been the source</a:t>
-            </a:r>
-          </a:p>
-          <a:p>
-            <a:pPr marL="0" indent="0">
-              <a:buNone/>
-            </a:pPr>
-            <a:r>
-              <a:rPr lang="en-US" sz="2400" dirty="0"/>
-              <a:t>with the highest electricity generated</a:t>
-            </a:r>
-          </a:p>
-          <a:p>
-            <a:r>
-              <a:rPr lang="en-US" sz="2400" dirty="0"/>
-              <a:t>Gas price will place an important role in predicting </a:t>
-            </a:r>
-          </a:p>
-          <a:p>
-            <a:pPr marL="0" indent="0">
-              <a:buNone/>
-            </a:pPr>
-            <a:r>
-              <a:rPr lang="en-US" sz="2400" dirty="0"/>
-              <a:t>the spot price , due to cogeneration</a:t>
-            </a:r>
-          </a:p>
-          <a:p>
-            <a:pPr marL="0" indent="0">
-              <a:buNone/>
-            </a:pPr>
-            <a:endParaRPr lang="en-US" sz="2400" dirty="0"/>
-          </a:p>
-          <a:p>
-            <a:endParaRPr lang="en-IN" sz="2400" dirty="0"/>
-          </a:p>
-        </p:txBody>
-      </p:sp>
-      <p:sp>
-        <p:nvSpPr>
-          <p:cNvPr id="4" name="Slide Number Placeholder 3">
-            <a:extLst>
-              <a:ext uri="{FF2B5EF4-FFF2-40B4-BE49-F238E27FC236}">
-                <a16:creationId xmlns:a16="http://schemas.microsoft.com/office/drawing/2014/main" id="{47C10DD6-CA8F-9455-74D0-CF686615787C}"/>
-              </a:ext>
-            </a:extLst>
-          </p:cNvPr>
-          <p:cNvSpPr>
-            <a:spLocks noGrp="1"/>
-          </p:cNvSpPr>
-          <p:nvPr>
-            <p:ph type="sldNum" sz="quarter" idx="12"/>
-          </p:nvPr>
-        </p:nvSpPr>
-        <p:spPr/>
-        <p:txBody>
-          <a:bodyPr/>
-          <a:lstStyle/>
-          <a:p>
-            <a:fld id="{5C35FCF4-C3EF-BD43-82E0-05BC237DAD2A}" type="slidenum">
-              <a:rPr lang="en-US" smtClean="0"/>
-              <a:pPr/>
-              <a:t>13</a:t>
-            </a:fld>
-            <a:endParaRPr lang="en-US" dirty="0"/>
-          </a:p>
-        </p:txBody>
-      </p:sp>
-      <p:pic>
-        <p:nvPicPr>
-          <p:cNvPr id="5" name="Picture 4">
-            <a:extLst>
-              <a:ext uri="{FF2B5EF4-FFF2-40B4-BE49-F238E27FC236}">
-                <a16:creationId xmlns:a16="http://schemas.microsoft.com/office/drawing/2014/main" id="{8AFCF6B0-0FCB-6739-E346-BB537C9407DB}"/>
-              </a:ext>
-            </a:extLst>
-          </p:cNvPr>
-          <p:cNvPicPr>
-            <a:picLocks noChangeAspect="1"/>
-          </p:cNvPicPr>
-          <p:nvPr/>
-        </p:nvPicPr>
-        <p:blipFill>
-          <a:blip r:embed="rId2"/>
-          <a:stretch>
-            <a:fillRect/>
-          </a:stretch>
-        </p:blipFill>
-        <p:spPr>
-          <a:xfrm>
-            <a:off x="6756032" y="3310753"/>
-            <a:ext cx="4106746" cy="1996393"/>
-          </a:xfrm>
-          <a:prstGeom prst="rect">
-            <a:avLst/>
-          </a:prstGeom>
-        </p:spPr>
-      </p:pic>
-      <p:pic>
-        <p:nvPicPr>
-          <p:cNvPr id="7" name="Graphic 6" descr="Dollar outline">
-            <a:extLst>
-              <a:ext uri="{FF2B5EF4-FFF2-40B4-BE49-F238E27FC236}">
-                <a16:creationId xmlns:a16="http://schemas.microsoft.com/office/drawing/2014/main" id="{59B6CF66-00AB-911F-6F8B-211212863EBC}"/>
-              </a:ext>
-            </a:extLst>
-          </p:cNvPr>
-          <p:cNvPicPr>
-            <a:picLocks noChangeAspect="1"/>
-          </p:cNvPicPr>
-          <p:nvPr/>
-        </p:nvPicPr>
-        <p:blipFill>
-          <a:blip r:embed="rId3">
-            <a:extLst>
-              <a:ext uri="{96DAC541-7B7A-43D3-8B79-37D633B846F1}">
-                <asvg:svgBlip xmlns:asvg="http://schemas.microsoft.com/office/drawing/2016/SVG/main" r:embed="rId4"/>
-              </a:ext>
-            </a:extLst>
-          </a:blip>
-          <a:stretch>
-            <a:fillRect/>
-          </a:stretch>
-        </p:blipFill>
-        <p:spPr>
-          <a:xfrm>
-            <a:off x="10706911" y="3759741"/>
-            <a:ext cx="914400" cy="914400"/>
-          </a:xfrm>
-          <a:prstGeom prst="rect">
-            <a:avLst/>
-          </a:prstGeom>
-        </p:spPr>
-      </p:pic>
-      <p:pic>
-        <p:nvPicPr>
-          <p:cNvPr id="9" name="Picture 8">
-            <a:extLst>
-              <a:ext uri="{FF2B5EF4-FFF2-40B4-BE49-F238E27FC236}">
-                <a16:creationId xmlns:a16="http://schemas.microsoft.com/office/drawing/2014/main" id="{D2F88250-620C-96D1-8862-8E98825FE62C}"/>
-              </a:ext>
-            </a:extLst>
-          </p:cNvPr>
-          <p:cNvPicPr>
-            <a:picLocks noChangeAspect="1"/>
-          </p:cNvPicPr>
-          <p:nvPr/>
-        </p:nvPicPr>
-        <p:blipFill>
-          <a:blip r:embed="rId5"/>
-          <a:stretch>
-            <a:fillRect/>
-          </a:stretch>
-        </p:blipFill>
-        <p:spPr>
-          <a:xfrm>
-            <a:off x="6745613" y="432173"/>
-            <a:ext cx="3772414" cy="2237362"/>
-          </a:xfrm>
-          <a:prstGeom prst="rect">
-            <a:avLst/>
-          </a:prstGeom>
-        </p:spPr>
-      </p:pic>
-      <p:pic>
-        <p:nvPicPr>
-          <p:cNvPr id="11" name="Graphic 10" descr="High temperature with solid fill">
-            <a:extLst>
-              <a:ext uri="{FF2B5EF4-FFF2-40B4-BE49-F238E27FC236}">
-                <a16:creationId xmlns:a16="http://schemas.microsoft.com/office/drawing/2014/main" id="{251C15EC-B87D-3C04-7BC6-7BB468F67190}"/>
-              </a:ext>
-            </a:extLst>
-          </p:cNvPr>
-          <p:cNvPicPr>
-            <a:picLocks noChangeAspect="1"/>
-          </p:cNvPicPr>
-          <p:nvPr/>
-        </p:nvPicPr>
-        <p:blipFill>
-          <a:blip r:embed="rId6">
-            <a:extLst>
-              <a:ext uri="{96DAC541-7B7A-43D3-8B79-37D633B846F1}">
-                <asvg:svgBlip xmlns:asvg="http://schemas.microsoft.com/office/drawing/2016/SVG/main" r:embed="rId7"/>
-              </a:ext>
-            </a:extLst>
-          </a:blip>
-          <a:stretch>
-            <a:fillRect/>
-          </a:stretch>
-        </p:blipFill>
-        <p:spPr>
-          <a:xfrm>
-            <a:off x="10706911" y="1378138"/>
-            <a:ext cx="914400" cy="914400"/>
-          </a:xfrm>
-          <a:prstGeom prst="rect">
-            <a:avLst/>
-          </a:prstGeom>
-        </p:spPr>
-      </p:pic>
-    </p:spTree>
-    <p:extLst>
-      <p:ext uri="{BB962C8B-B14F-4D97-AF65-F5344CB8AC3E}">
-        <p14:creationId xmlns:p14="http://schemas.microsoft.com/office/powerpoint/2010/main" val="300444134"/>
-      </p:ext>
-    </p:extLst>
-  </p:cSld>
-  <p:clrMapOvr>
-    <a:masterClrMapping/>
-  </p:clrMapOvr>
-</p:sld>
-</file>
-
-<file path=ppt/slides/slide14.xml><?xml version="1.0" encoding="utf-8"?>
-<p:sld xmlns:a="http://schemas.openxmlformats.org/drawingml/2006/main" xmlns:r="http://schemas.openxmlformats.org/officeDocument/2006/relationships" xmlns:p="http://schemas.openxmlformats.org/presentationml/2006/main" show="0">
-  <p:cSld>
-    <p:spTree>
-      <p:nvGrpSpPr>
-        <p:cNvPr id="1" name=""/>
-        <p:cNvGrpSpPr/>
-        <p:nvPr/>
-      </p:nvGrpSpPr>
-      <p:grpSpPr>
-        <a:xfrm>
-          <a:off x="0" y="0"/>
-          <a:ext cx="0" cy="0"/>
-          <a:chOff x="0" y="0"/>
-          <a:chExt cx="0" cy="0"/>
-        </a:xfrm>
-      </p:grpSpPr>
-      <p:sp>
-        <p:nvSpPr>
-          <p:cNvPr id="3" name="Content Placeholder 2">
-            <a:extLst>
-              <a:ext uri="{FF2B5EF4-FFF2-40B4-BE49-F238E27FC236}">
-                <a16:creationId xmlns:a16="http://schemas.microsoft.com/office/drawing/2014/main" id="{4A499FD7-70C6-AA1D-B99C-FA2E6159665F}"/>
-              </a:ext>
-            </a:extLst>
-          </p:cNvPr>
-          <p:cNvSpPr>
-            <a:spLocks noGrp="1"/>
-          </p:cNvSpPr>
-          <p:nvPr>
-            <p:ph idx="1"/>
-          </p:nvPr>
-        </p:nvSpPr>
-        <p:spPr>
-          <a:xfrm>
-            <a:off x="562628" y="583661"/>
-            <a:ext cx="9724372" cy="5305204"/>
-          </a:xfrm>
-        </p:spPr>
-        <p:txBody>
-          <a:bodyPr/>
-          <a:lstStyle/>
-          <a:p>
-            <a:pPr marL="0" indent="0">
-              <a:buNone/>
-            </a:pPr>
-            <a:r>
-              <a:rPr lang="en-US" dirty="0">
-                <a:solidFill>
-                  <a:schemeClr val="accent1">
-                    <a:lumMod val="75000"/>
-                  </a:schemeClr>
-                </a:solidFill>
-              </a:rPr>
-              <a:t>4</a:t>
-            </a:r>
-            <a:r>
-              <a:rPr lang="en-US" sz="2800" dirty="0">
-                <a:solidFill>
-                  <a:schemeClr val="accent1">
-                    <a:lumMod val="75000"/>
-                  </a:schemeClr>
-                </a:solidFill>
-              </a:rPr>
-              <a:t>. </a:t>
-            </a:r>
-            <a:r>
-              <a:rPr lang="en-IN" sz="2400" dirty="0"/>
-              <a:t>Generation – The generation </a:t>
-            </a:r>
-          </a:p>
-          <a:p>
-            <a:pPr marL="0" indent="0">
-              <a:buNone/>
-            </a:pPr>
-            <a:r>
-              <a:rPr lang="en-IN" sz="2400" dirty="0"/>
-              <a:t>of electricity will play a role in </a:t>
-            </a:r>
-          </a:p>
-          <a:p>
-            <a:pPr marL="0" indent="0">
-              <a:buNone/>
-            </a:pPr>
-            <a:r>
-              <a:rPr lang="en-IN" sz="2400" dirty="0"/>
-              <a:t>determining the spot price</a:t>
-            </a:r>
-          </a:p>
-          <a:p>
-            <a:pPr marL="0" indent="0">
-              <a:buNone/>
-            </a:pPr>
-            <a:endParaRPr lang="en-IN" sz="2400" dirty="0"/>
-          </a:p>
-          <a:p>
-            <a:r>
-              <a:rPr lang="en-IN" sz="2400" dirty="0"/>
-              <a:t>There is a strong correlation</a:t>
-            </a:r>
-          </a:p>
-          <a:p>
-            <a:pPr marL="0" indent="0">
-              <a:buNone/>
-            </a:pPr>
-            <a:r>
-              <a:rPr lang="en-IN" sz="2400" dirty="0"/>
-              <a:t>between the demand and the </a:t>
-            </a:r>
-          </a:p>
-          <a:p>
-            <a:pPr marL="0" indent="0">
-              <a:buNone/>
-            </a:pPr>
-            <a:r>
-              <a:rPr lang="en-IN" sz="2400" dirty="0"/>
-              <a:t>generation</a:t>
-            </a:r>
-          </a:p>
-          <a:p>
-            <a:endParaRPr lang="en-IN" sz="2400" dirty="0"/>
-          </a:p>
-          <a:p>
-            <a:r>
-              <a:rPr lang="en-IN" sz="2400" dirty="0"/>
-              <a:t>We can understand the impact</a:t>
-            </a:r>
-          </a:p>
-          <a:p>
-            <a:pPr marL="0" indent="0">
-              <a:buNone/>
-            </a:pPr>
-            <a:r>
-              <a:rPr lang="en-IN" sz="2400" dirty="0"/>
-              <a:t>of the price by visualizing the </a:t>
-            </a:r>
-          </a:p>
-          <a:p>
-            <a:pPr marL="0" indent="0">
-              <a:buNone/>
-            </a:pPr>
-            <a:r>
-              <a:rPr lang="en-IN" sz="2400" dirty="0"/>
-              <a:t>generation vs price data </a:t>
-            </a:r>
-          </a:p>
-          <a:p>
-            <a:endParaRPr lang="en-IN" dirty="0"/>
-          </a:p>
-        </p:txBody>
-      </p:sp>
-      <p:sp>
-        <p:nvSpPr>
-          <p:cNvPr id="4" name="Slide Number Placeholder 3">
-            <a:extLst>
-              <a:ext uri="{FF2B5EF4-FFF2-40B4-BE49-F238E27FC236}">
-                <a16:creationId xmlns:a16="http://schemas.microsoft.com/office/drawing/2014/main" id="{8896F38D-9919-5C8B-F9CC-78759C5056E6}"/>
-              </a:ext>
-            </a:extLst>
-          </p:cNvPr>
-          <p:cNvSpPr>
-            <a:spLocks noGrp="1"/>
-          </p:cNvSpPr>
-          <p:nvPr>
-            <p:ph type="sldNum" sz="quarter" idx="12"/>
-          </p:nvPr>
-        </p:nvSpPr>
-        <p:spPr/>
-        <p:txBody>
-          <a:bodyPr/>
-          <a:lstStyle/>
-          <a:p>
-            <a:fld id="{5C35FCF4-C3EF-BD43-82E0-05BC237DAD2A}" type="slidenum">
-              <a:rPr lang="en-US" smtClean="0"/>
-              <a:pPr/>
-              <a:t>14</a:t>
-            </a:fld>
-            <a:endParaRPr lang="en-US" dirty="0"/>
-          </a:p>
-        </p:txBody>
-      </p:sp>
-      <p:pic>
-        <p:nvPicPr>
-          <p:cNvPr id="6" name="Picture 5">
-            <a:extLst>
-              <a:ext uri="{FF2B5EF4-FFF2-40B4-BE49-F238E27FC236}">
-                <a16:creationId xmlns:a16="http://schemas.microsoft.com/office/drawing/2014/main" id="{5E1DA897-0E64-79AE-A234-36E17FD9E8D7}"/>
-              </a:ext>
-            </a:extLst>
-          </p:cNvPr>
-          <p:cNvPicPr>
-            <a:picLocks noChangeAspect="1"/>
-          </p:cNvPicPr>
-          <p:nvPr/>
-        </p:nvPicPr>
-        <p:blipFill>
-          <a:blip r:embed="rId2"/>
-          <a:stretch>
-            <a:fillRect/>
-          </a:stretch>
-        </p:blipFill>
-        <p:spPr>
-          <a:xfrm>
-            <a:off x="5496023" y="969135"/>
-            <a:ext cx="4925776" cy="2902474"/>
-          </a:xfrm>
-          <a:prstGeom prst="rect">
-            <a:avLst/>
-          </a:prstGeom>
-        </p:spPr>
-      </p:pic>
-      <p:pic>
-        <p:nvPicPr>
-          <p:cNvPr id="8" name="Graphic 7" descr="Upward trend with solid fill">
-            <a:extLst>
-              <a:ext uri="{FF2B5EF4-FFF2-40B4-BE49-F238E27FC236}">
-                <a16:creationId xmlns:a16="http://schemas.microsoft.com/office/drawing/2014/main" id="{FD19E575-71D7-1B08-1ADC-D9FE148681B8}"/>
-              </a:ext>
-            </a:extLst>
-          </p:cNvPr>
-          <p:cNvPicPr>
-            <a:picLocks noChangeAspect="1"/>
-          </p:cNvPicPr>
-          <p:nvPr/>
-        </p:nvPicPr>
-        <p:blipFill>
-          <a:blip r:embed="rId3">
-            <a:extLst>
-              <a:ext uri="{96DAC541-7B7A-43D3-8B79-37D633B846F1}">
-                <asvg:svgBlip xmlns:asvg="http://schemas.microsoft.com/office/drawing/2016/SVG/main" r:embed="rId4"/>
-              </a:ext>
-            </a:extLst>
-          </a:blip>
-          <a:stretch>
-            <a:fillRect/>
-          </a:stretch>
-        </p:blipFill>
-        <p:spPr>
-          <a:xfrm>
-            <a:off x="10556596" y="1867710"/>
-            <a:ext cx="1094362" cy="1094362"/>
-          </a:xfrm>
-          <a:prstGeom prst="rect">
-            <a:avLst/>
-          </a:prstGeom>
-        </p:spPr>
-      </p:pic>
-    </p:spTree>
-    <p:extLst>
-      <p:ext uri="{BB962C8B-B14F-4D97-AF65-F5344CB8AC3E}">
-        <p14:creationId xmlns:p14="http://schemas.microsoft.com/office/powerpoint/2010/main" val="1620598711"/>
-      </p:ext>
-    </p:extLst>
-  </p:cSld>
-  <p:clrMapOvr>
-    <a:masterClrMapping/>
-  </p:clrMapOvr>
-</p:sld>
-</file>
-
-<file path=ppt/slides/slide2.xml><?xml version="1.0" encoding="utf-8"?>
-<p:sld xmlns:a="http://schemas.openxmlformats.org/drawingml/2006/main" xmlns:r="http://schemas.openxmlformats.org/officeDocument/2006/relationships" xmlns:p="http://schemas.openxmlformats.org/presentationml/2006/main">
-  <p:cSld>
-    <p:spTree>
-      <p:nvGrpSpPr>
-        <p:cNvPr id="1" name=""/>
-        <p:cNvGrpSpPr/>
-        <p:nvPr/>
-      </p:nvGrpSpPr>
-      <p:grpSpPr>
-        <a:xfrm>
-          <a:off x="0" y="0"/>
-          <a:ext cx="0" cy="0"/>
-          <a:chOff x="0" y="0"/>
-          <a:chExt cx="0" cy="0"/>
-        </a:xfrm>
-      </p:grpSpPr>
-      <p:sp>
-        <p:nvSpPr>
-          <p:cNvPr id="2" name="Title 1">
-            <a:extLst>
-              <a:ext uri="{FF2B5EF4-FFF2-40B4-BE49-F238E27FC236}">
-                <a16:creationId xmlns:a16="http://schemas.microsoft.com/office/drawing/2014/main" id="{5EDD2AD0-B422-9948-BB03-1443DE901CD6}"/>
-              </a:ext>
-            </a:extLst>
-          </p:cNvPr>
-          <p:cNvSpPr>
-            <a:spLocks noGrp="1"/>
-          </p:cNvSpPr>
-          <p:nvPr>
-            <p:ph type="title"/>
-          </p:nvPr>
-        </p:nvSpPr>
-        <p:spPr/>
-        <p:txBody>
-          <a:bodyPr/>
-          <a:lstStyle/>
-          <a:p>
-            <a:r>
-              <a:rPr lang="en-US" dirty="0"/>
-              <a:t>Introduction</a:t>
-            </a:r>
-          </a:p>
-        </p:txBody>
-      </p:sp>
-      <p:sp>
-        <p:nvSpPr>
-          <p:cNvPr id="3" name="Content Placeholder 2">
-            <a:extLst>
-              <a:ext uri="{FF2B5EF4-FFF2-40B4-BE49-F238E27FC236}">
-                <a16:creationId xmlns:a16="http://schemas.microsoft.com/office/drawing/2014/main" id="{5480ABD6-B0BD-B94F-9DA7-56F8E322B8EC}"/>
-              </a:ext>
-            </a:extLst>
-          </p:cNvPr>
-          <p:cNvSpPr>
-            <a:spLocks noGrp="1"/>
-          </p:cNvSpPr>
-          <p:nvPr>
-            <p:ph idx="1"/>
-          </p:nvPr>
-        </p:nvSpPr>
-        <p:spPr>
-          <a:xfrm>
-            <a:off x="562628" y="1371165"/>
-            <a:ext cx="9724372" cy="4115669"/>
-          </a:xfrm>
-        </p:spPr>
-        <p:txBody>
-          <a:bodyPr/>
-          <a:lstStyle/>
-          <a:p>
-            <a:pPr>
-              <a:lnSpc>
-                <a:spcPct val="150000"/>
-              </a:lnSpc>
-              <a:spcBef>
-                <a:spcPts val="0"/>
-              </a:spcBef>
-            </a:pPr>
-            <a:r>
-              <a:rPr lang="en-US" sz="1800" b="0" i="0" dirty="0">
-                <a:effectLst/>
-                <a:latin typeface="system-ui"/>
-              </a:rPr>
-              <a:t>Alberta established a deregulated electricity market in 1996 with the Electric Utilities Act (EUA), creating the possibility for private companies to compete for customers</a:t>
-            </a:r>
-            <a:endParaRPr lang="en-US" sz="1800" dirty="0"/>
-          </a:p>
-          <a:p>
-            <a:pPr>
-              <a:lnSpc>
-                <a:spcPct val="150000"/>
-              </a:lnSpc>
-              <a:spcBef>
-                <a:spcPts val="0"/>
-              </a:spcBef>
-            </a:pPr>
-            <a:r>
-              <a:rPr lang="en-US" sz="1800" dirty="0"/>
-              <a:t>The AESO also collects and evaluates industry public data and will be the primary data source for this project</a:t>
-            </a:r>
-          </a:p>
-          <a:p>
-            <a:pPr>
-              <a:lnSpc>
-                <a:spcPct val="150000"/>
-              </a:lnSpc>
-              <a:spcBef>
-                <a:spcPts val="0"/>
-              </a:spcBef>
-            </a:pPr>
-            <a:r>
-              <a:rPr lang="en-US" sz="1800" dirty="0"/>
-              <a:t>The </a:t>
-            </a:r>
-            <a:r>
-              <a:rPr lang="en-US" sz="1800" b="1" dirty="0"/>
-              <a:t>Balancing Pool </a:t>
-            </a:r>
-            <a:r>
-              <a:rPr lang="en-US" sz="1800" dirty="0"/>
-              <a:t>administers a wholesale electricity market or ‘spot market’.</a:t>
-            </a:r>
-          </a:p>
-          <a:p>
-            <a:pPr>
-              <a:lnSpc>
-                <a:spcPct val="150000"/>
-              </a:lnSpc>
-              <a:spcBef>
-                <a:spcPts val="0"/>
-              </a:spcBef>
-            </a:pPr>
-            <a:r>
-              <a:rPr lang="en-US" sz="1800" dirty="0"/>
-              <a:t>The Power Pool matches the lowest-priced supply with demand by establishing a pool price that is revised hourly</a:t>
-            </a:r>
-          </a:p>
-        </p:txBody>
-      </p:sp>
-      <p:sp>
-        <p:nvSpPr>
-          <p:cNvPr id="4" name="Slide Number Placeholder 3">
-            <a:extLst>
-              <a:ext uri="{FF2B5EF4-FFF2-40B4-BE49-F238E27FC236}">
-                <a16:creationId xmlns:a16="http://schemas.microsoft.com/office/drawing/2014/main" id="{724FA3F3-625E-CA46-8A0A-6A0AF37CFDC8}"/>
-              </a:ext>
-            </a:extLst>
-          </p:cNvPr>
-          <p:cNvSpPr>
-            <a:spLocks noGrp="1"/>
-          </p:cNvSpPr>
-          <p:nvPr>
-            <p:ph type="sldNum" sz="quarter" idx="12"/>
-          </p:nvPr>
-        </p:nvSpPr>
-        <p:spPr/>
-        <p:txBody>
-          <a:bodyPr/>
-          <a:lstStyle/>
-          <a:p>
-            <a:fld id="{5C35FCF4-C3EF-BD43-82E0-05BC237DAD2A}" type="slidenum">
-              <a:rPr lang="en-US" smtClean="0"/>
-              <a:pPr/>
-              <a:t>2</a:t>
-            </a:fld>
-            <a:endParaRPr lang="en-US" dirty="0"/>
-          </a:p>
-        </p:txBody>
-      </p:sp>
-    </p:spTree>
-    <p:extLst>
-      <p:ext uri="{BB962C8B-B14F-4D97-AF65-F5344CB8AC3E}">
-        <p14:creationId xmlns:p14="http://schemas.microsoft.com/office/powerpoint/2010/main" val="14210611"/>
-      </p:ext>
-    </p:extLst>
-  </p:cSld>
-  <p:clrMapOvr>
-    <a:masterClrMapping/>
-  </p:clrMapOvr>
-</p:sld>
-</file>
-
-<file path=ppt/slides/slide3.xml><?xml version="1.0" encoding="utf-8"?>
-<p:sld xmlns:a="http://schemas.openxmlformats.org/drawingml/2006/main" xmlns:r="http://schemas.openxmlformats.org/officeDocument/2006/relationships" xmlns:p="http://schemas.openxmlformats.org/presentationml/2006/main">
-  <p:cSld>
-    <p:spTree>
-      <p:nvGrpSpPr>
-        <p:cNvPr id="1" name=""/>
-        <p:cNvGrpSpPr/>
-        <p:nvPr/>
-      </p:nvGrpSpPr>
-      <p:grpSpPr>
-        <a:xfrm>
-          <a:off x="0" y="0"/>
-          <a:ext cx="0" cy="0"/>
-          <a:chOff x="0" y="0"/>
-          <a:chExt cx="0" cy="0"/>
-        </a:xfrm>
-      </p:grpSpPr>
-      <p:sp>
-        <p:nvSpPr>
-          <p:cNvPr id="2" name="Title 1">
-            <a:extLst>
-              <a:ext uri="{FF2B5EF4-FFF2-40B4-BE49-F238E27FC236}">
-                <a16:creationId xmlns:a16="http://schemas.microsoft.com/office/drawing/2014/main" id="{273C65DF-767B-24D1-1E1D-14E4FF0CDECF}"/>
-              </a:ext>
-            </a:extLst>
-          </p:cNvPr>
-          <p:cNvSpPr>
-            <a:spLocks noGrp="1"/>
-          </p:cNvSpPr>
-          <p:nvPr>
-            <p:ph type="title"/>
-          </p:nvPr>
-        </p:nvSpPr>
-        <p:spPr/>
-        <p:txBody>
-          <a:bodyPr>
-            <a:normAutofit/>
-          </a:bodyPr>
-          <a:lstStyle/>
-          <a:p>
-            <a:r>
-              <a:rPr lang="en-US" dirty="0"/>
-              <a:t>Background</a:t>
-            </a:r>
-            <a:endParaRPr lang="en-IN" dirty="0"/>
-          </a:p>
-        </p:txBody>
-      </p:sp>
-      <p:sp>
-        <p:nvSpPr>
-          <p:cNvPr id="3" name="Content Placeholder 2">
-            <a:extLst>
-              <a:ext uri="{FF2B5EF4-FFF2-40B4-BE49-F238E27FC236}">
-                <a16:creationId xmlns:a16="http://schemas.microsoft.com/office/drawing/2014/main" id="{2C3485C5-5A29-46EE-605E-6B2194CEA6D7}"/>
-              </a:ext>
-            </a:extLst>
-          </p:cNvPr>
-          <p:cNvSpPr>
-            <a:spLocks noGrp="1"/>
-          </p:cNvSpPr>
-          <p:nvPr>
-            <p:ph idx="1"/>
-          </p:nvPr>
-        </p:nvSpPr>
-        <p:spPr/>
-        <p:txBody>
-          <a:bodyPr/>
-          <a:lstStyle/>
-          <a:p>
-            <a:pPr algn="just"/>
-            <a:r>
-              <a:rPr lang="en-US" sz="1800" b="0" i="0" dirty="0">
-                <a:effectLst/>
-                <a:latin typeface="system-ui"/>
-              </a:rPr>
-              <a:t>The market has multiple private providers such as ENMAX, ATCO, ENCOR and Direct Energy</a:t>
-            </a:r>
-          </a:p>
-          <a:p>
-            <a:pPr algn="just"/>
-            <a:r>
-              <a:rPr lang="en-US" sz="1800" dirty="0"/>
-              <a:t>Companies have the option of generating their power or buying short-term contracts on the spot market, or a mix of both.</a:t>
-            </a:r>
-          </a:p>
-          <a:p>
-            <a:pPr algn="just"/>
-            <a:r>
-              <a:rPr lang="en-US" sz="1800" dirty="0"/>
-              <a:t>The power supplied to the spot market is primarily generated by private or public entities.</a:t>
-            </a:r>
-          </a:p>
-        </p:txBody>
-      </p:sp>
-      <p:sp>
-        <p:nvSpPr>
-          <p:cNvPr id="4" name="Slide Number Placeholder 3">
-            <a:extLst>
-              <a:ext uri="{FF2B5EF4-FFF2-40B4-BE49-F238E27FC236}">
-                <a16:creationId xmlns:a16="http://schemas.microsoft.com/office/drawing/2014/main" id="{6B9C625D-9F02-E6D9-A336-9651482EBB60}"/>
-              </a:ext>
-            </a:extLst>
-          </p:cNvPr>
-          <p:cNvSpPr>
-            <a:spLocks noGrp="1"/>
-          </p:cNvSpPr>
-          <p:nvPr>
-            <p:ph type="sldNum" sz="quarter" idx="12"/>
-          </p:nvPr>
-        </p:nvSpPr>
-        <p:spPr/>
-        <p:txBody>
-          <a:bodyPr/>
-          <a:lstStyle/>
-          <a:p>
-            <a:fld id="{5C35FCF4-C3EF-BD43-82E0-05BC237DAD2A}" type="slidenum">
-              <a:rPr lang="en-US" smtClean="0"/>
-              <a:pPr/>
-              <a:t>3</a:t>
-            </a:fld>
-            <a:endParaRPr lang="en-US" dirty="0"/>
-          </a:p>
-        </p:txBody>
-      </p:sp>
-    </p:spTree>
-    <p:extLst>
-      <p:ext uri="{BB962C8B-B14F-4D97-AF65-F5344CB8AC3E}">
-        <p14:creationId xmlns:p14="http://schemas.microsoft.com/office/powerpoint/2010/main" val="443483967"/>
-      </p:ext>
-    </p:extLst>
-  </p:cSld>
-  <p:clrMapOvr>
-    <a:masterClrMapping/>
-  </p:clrMapOvr>
-</p:sld>
-</file>
-
-<file path=ppt/slides/slide4.xml><?xml version="1.0" encoding="utf-8"?>
-<p:sld xmlns:a="http://schemas.openxmlformats.org/drawingml/2006/main" xmlns:r="http://schemas.openxmlformats.org/officeDocument/2006/relationships" xmlns:p="http://schemas.openxmlformats.org/presentationml/2006/main">
-  <p:cSld>
-    <p:spTree>
-      <p:nvGrpSpPr>
-        <p:cNvPr id="1" name=""/>
-        <p:cNvGrpSpPr/>
-        <p:nvPr/>
-      </p:nvGrpSpPr>
-      <p:grpSpPr>
-        <a:xfrm>
-          <a:off x="0" y="0"/>
-          <a:ext cx="0" cy="0"/>
-          <a:chOff x="0" y="0"/>
-          <a:chExt cx="0" cy="0"/>
-        </a:xfrm>
-      </p:grpSpPr>
-      <p:sp>
-        <p:nvSpPr>
-          <p:cNvPr id="2" name="Title 1">
-            <a:extLst>
-              <a:ext uri="{FF2B5EF4-FFF2-40B4-BE49-F238E27FC236}">
-                <a16:creationId xmlns:a16="http://schemas.microsoft.com/office/drawing/2014/main" id="{E2B0AB8E-7B40-9F18-0EC7-4E1126527C3B}"/>
-              </a:ext>
-            </a:extLst>
-          </p:cNvPr>
-          <p:cNvSpPr>
-            <a:spLocks noGrp="1"/>
-          </p:cNvSpPr>
-          <p:nvPr>
-            <p:ph type="title"/>
-          </p:nvPr>
-        </p:nvSpPr>
-        <p:spPr/>
-        <p:txBody>
-          <a:bodyPr/>
-          <a:lstStyle/>
-          <a:p>
-            <a:r>
-              <a:rPr lang="en-US" dirty="0"/>
-              <a:t>Objective		</a:t>
-            </a:r>
-            <a:endParaRPr lang="en-IN" dirty="0"/>
-          </a:p>
-        </p:txBody>
-      </p:sp>
-      <p:sp>
-        <p:nvSpPr>
-          <p:cNvPr id="3" name="Content Placeholder 2">
-            <a:extLst>
-              <a:ext uri="{FF2B5EF4-FFF2-40B4-BE49-F238E27FC236}">
-                <a16:creationId xmlns:a16="http://schemas.microsoft.com/office/drawing/2014/main" id="{59AC0C05-3BC4-DD84-FAA2-902007B1AAF0}"/>
-              </a:ext>
-            </a:extLst>
-          </p:cNvPr>
-          <p:cNvSpPr>
-            <a:spLocks noGrp="1"/>
-          </p:cNvSpPr>
-          <p:nvPr>
-            <p:ph idx="1"/>
-          </p:nvPr>
-        </p:nvSpPr>
-        <p:spPr>
-          <a:xfrm>
-            <a:off x="562628" y="1871037"/>
-            <a:ext cx="9724372" cy="2804160"/>
-          </a:xfrm>
-        </p:spPr>
-        <p:txBody>
-          <a:bodyPr/>
-          <a:lstStyle/>
-          <a:p>
-            <a:pPr algn="just"/>
-            <a:r>
-              <a:rPr lang="en-IN" sz="2000" dirty="0"/>
-              <a:t>Study the relationship between a group of variables and spot prices based on different factors such as </a:t>
-            </a:r>
-            <a:r>
-              <a:rPr lang="en-US" sz="2000" dirty="0"/>
-              <a:t>weather, population growth, type of generation and demand.</a:t>
-            </a:r>
-          </a:p>
-          <a:p>
-            <a:pPr algn="just"/>
-            <a:r>
-              <a:rPr lang="en-IN" sz="2000" dirty="0"/>
-              <a:t>Develop a time-series model that can predict with certain confidence the spot price for next hours.</a:t>
-            </a:r>
-          </a:p>
-          <a:p>
-            <a:pPr algn="just"/>
-            <a:r>
-              <a:rPr lang="en-IN" sz="2000" dirty="0"/>
-              <a:t>Understand the different energy sources and the amount of electricity generated from each of these sources</a:t>
-            </a:r>
-          </a:p>
-        </p:txBody>
-      </p:sp>
-      <p:sp>
-        <p:nvSpPr>
-          <p:cNvPr id="4" name="Slide Number Placeholder 3">
-            <a:extLst>
-              <a:ext uri="{FF2B5EF4-FFF2-40B4-BE49-F238E27FC236}">
-                <a16:creationId xmlns:a16="http://schemas.microsoft.com/office/drawing/2014/main" id="{FC35C989-193C-3FDB-0D2E-F1FCBE3DFF66}"/>
-              </a:ext>
-            </a:extLst>
-          </p:cNvPr>
-          <p:cNvSpPr>
-            <a:spLocks noGrp="1"/>
-          </p:cNvSpPr>
-          <p:nvPr>
-            <p:ph type="sldNum" sz="quarter" idx="12"/>
-          </p:nvPr>
-        </p:nvSpPr>
-        <p:spPr/>
-        <p:txBody>
-          <a:bodyPr/>
-          <a:lstStyle/>
-          <a:p>
-            <a:fld id="{5C35FCF4-C3EF-BD43-82E0-05BC237DAD2A}" type="slidenum">
-              <a:rPr lang="en-US" smtClean="0"/>
-              <a:pPr/>
-              <a:t>4</a:t>
-            </a:fld>
-            <a:endParaRPr lang="en-US" dirty="0"/>
-          </a:p>
-        </p:txBody>
-      </p:sp>
-    </p:spTree>
-    <p:extLst>
-      <p:ext uri="{BB962C8B-B14F-4D97-AF65-F5344CB8AC3E}">
-        <p14:creationId xmlns:p14="http://schemas.microsoft.com/office/powerpoint/2010/main" val="3913368451"/>
-      </p:ext>
-    </p:extLst>
-  </p:cSld>
-  <p:clrMapOvr>
-    <a:masterClrMapping/>
-  </p:clrMapOvr>
-</p:sld>
-</file>
-
-<file path=ppt/slides/slide5.xml><?xml version="1.0" encoding="utf-8"?>
-<p:sld xmlns:a="http://schemas.openxmlformats.org/drawingml/2006/main" xmlns:r="http://schemas.openxmlformats.org/officeDocument/2006/relationships" xmlns:p="http://schemas.openxmlformats.org/presentationml/2006/main">
-  <p:cSld>
-    <p:spTree>
-      <p:nvGrpSpPr>
-        <p:cNvPr id="1" name=""/>
-        <p:cNvGrpSpPr/>
-        <p:nvPr/>
-      </p:nvGrpSpPr>
-      <p:grpSpPr>
-        <a:xfrm>
-          <a:off x="0" y="0"/>
-          <a:ext cx="0" cy="0"/>
-          <a:chOff x="0" y="0"/>
-          <a:chExt cx="0" cy="0"/>
-        </a:xfrm>
-      </p:grpSpPr>
-      <p:sp>
-        <p:nvSpPr>
-          <p:cNvPr id="2" name="Title 1">
-            <a:extLst>
-              <a:ext uri="{FF2B5EF4-FFF2-40B4-BE49-F238E27FC236}">
-                <a16:creationId xmlns:a16="http://schemas.microsoft.com/office/drawing/2014/main" id="{2086750A-DAA9-5989-0F16-EF0A1E7D314E}"/>
-              </a:ext>
-            </a:extLst>
-          </p:cNvPr>
-          <p:cNvSpPr>
-            <a:spLocks noGrp="1"/>
-          </p:cNvSpPr>
-          <p:nvPr>
-            <p:ph type="title"/>
-          </p:nvPr>
-        </p:nvSpPr>
-        <p:spPr/>
-        <p:txBody>
-          <a:bodyPr/>
-          <a:lstStyle/>
-          <a:p>
-            <a:r>
-              <a:rPr lang="en-US" dirty="0"/>
-              <a:t>Insights gained from each dataset	</a:t>
-            </a:r>
-            <a:endParaRPr lang="en-IN" dirty="0"/>
-          </a:p>
-        </p:txBody>
-      </p:sp>
-      <p:sp>
-        <p:nvSpPr>
-          <p:cNvPr id="3" name="Content Placeholder 2">
-            <a:extLst>
-              <a:ext uri="{FF2B5EF4-FFF2-40B4-BE49-F238E27FC236}">
-                <a16:creationId xmlns:a16="http://schemas.microsoft.com/office/drawing/2014/main" id="{C50EB759-C44B-42FC-9EEE-77CADB8D8033}"/>
-              </a:ext>
-            </a:extLst>
-          </p:cNvPr>
-          <p:cNvSpPr>
-            <a:spLocks noGrp="1"/>
-          </p:cNvSpPr>
-          <p:nvPr>
-            <p:ph idx="1"/>
-          </p:nvPr>
-        </p:nvSpPr>
-        <p:spPr>
-          <a:xfrm>
-            <a:off x="562628" y="2140085"/>
-            <a:ext cx="10977100" cy="3748779"/>
-          </a:xfrm>
-        </p:spPr>
-        <p:txBody>
-          <a:bodyPr/>
-          <a:lstStyle/>
-          <a:p>
-            <a:pPr algn="just"/>
-            <a:r>
-              <a:rPr lang="en-US" sz="1800" b="1" dirty="0"/>
-              <a:t>Temperature data:</a:t>
-            </a:r>
-            <a:r>
-              <a:rPr lang="en-US" sz="1800" dirty="0"/>
-              <a:t> this dataset when joined with the generation data gives us some insights on what the generation value is based on the temperature</a:t>
-            </a:r>
-          </a:p>
-          <a:p>
-            <a:pPr algn="just"/>
-            <a:r>
-              <a:rPr lang="en-IN" sz="1800" dirty="0"/>
-              <a:t>We can combine 2 datasets using an </a:t>
-            </a:r>
-            <a:r>
-              <a:rPr lang="en-IN" sz="1800" b="1" i="1" dirty="0"/>
-              <a:t>inner join </a:t>
-            </a:r>
-            <a:r>
-              <a:rPr lang="en-IN" sz="1800" dirty="0"/>
-              <a:t>based on the date/hour column</a:t>
-            </a:r>
-          </a:p>
-          <a:p>
-            <a:pPr algn="just"/>
-            <a:r>
-              <a:rPr lang="en-IN" sz="1800" dirty="0"/>
-              <a:t>Ordering the results by temperature, we can see which days have the highest electricity generated compared to the lowest temperatures</a:t>
-            </a:r>
-          </a:p>
-          <a:p>
-            <a:pPr algn="just"/>
-            <a:r>
-              <a:rPr lang="en-IN" sz="1800" dirty="0"/>
-              <a:t>We are expected to see a rise in electricity generated when the temperatures increase, as air-conditioners and humidifiers are turned on.</a:t>
-            </a:r>
-          </a:p>
-        </p:txBody>
-      </p:sp>
-      <p:sp>
-        <p:nvSpPr>
-          <p:cNvPr id="4" name="Slide Number Placeholder 3">
-            <a:extLst>
-              <a:ext uri="{FF2B5EF4-FFF2-40B4-BE49-F238E27FC236}">
-                <a16:creationId xmlns:a16="http://schemas.microsoft.com/office/drawing/2014/main" id="{32E76D7A-D9D0-544A-F7AE-BBD35D106EFA}"/>
-              </a:ext>
-            </a:extLst>
-          </p:cNvPr>
-          <p:cNvSpPr>
-            <a:spLocks noGrp="1"/>
-          </p:cNvSpPr>
-          <p:nvPr>
-            <p:ph type="sldNum" sz="quarter" idx="12"/>
-          </p:nvPr>
-        </p:nvSpPr>
-        <p:spPr/>
-        <p:txBody>
-          <a:bodyPr/>
-          <a:lstStyle/>
-          <a:p>
-            <a:fld id="{5C35FCF4-C3EF-BD43-82E0-05BC237DAD2A}" type="slidenum">
-              <a:rPr lang="en-US" smtClean="0"/>
-              <a:pPr/>
-              <a:t>5</a:t>
-            </a:fld>
-            <a:endParaRPr lang="en-US" dirty="0"/>
-          </a:p>
-        </p:txBody>
-      </p:sp>
-    </p:spTree>
-    <p:extLst>
-      <p:ext uri="{BB962C8B-B14F-4D97-AF65-F5344CB8AC3E}">
-        <p14:creationId xmlns:p14="http://schemas.microsoft.com/office/powerpoint/2010/main" val="3008990893"/>
-      </p:ext>
-    </p:extLst>
-  </p:cSld>
-  <p:clrMapOvr>
-    <a:masterClrMapping/>
-  </p:clrMapOvr>
-</p:sld>
-</file>
-
-<file path=ppt/slides/slide6.xml><?xml version="1.0" encoding="utf-8"?>
-<p:sld xmlns:a="http://schemas.openxmlformats.org/drawingml/2006/main" xmlns:r="http://schemas.openxmlformats.org/officeDocument/2006/relationships" xmlns:p="http://schemas.openxmlformats.org/presentationml/2006/main">
-  <p:cSld>
-    <p:spTree>
-      <p:nvGrpSpPr>
-        <p:cNvPr id="1" name=""/>
-        <p:cNvGrpSpPr/>
-        <p:nvPr/>
-      </p:nvGrpSpPr>
-      <p:grpSpPr>
-        <a:xfrm>
-          <a:off x="0" y="0"/>
-          <a:ext cx="0" cy="0"/>
-          <a:chOff x="0" y="0"/>
-          <a:chExt cx="0" cy="0"/>
-        </a:xfrm>
-      </p:grpSpPr>
-      <p:sp>
-        <p:nvSpPr>
-          <p:cNvPr id="3" name="Content Placeholder 2">
-            <a:extLst>
-              <a:ext uri="{FF2B5EF4-FFF2-40B4-BE49-F238E27FC236}">
-                <a16:creationId xmlns:a16="http://schemas.microsoft.com/office/drawing/2014/main" id="{D36ED97D-0292-F4F4-E3BC-94BFD57979DF}"/>
-              </a:ext>
-            </a:extLst>
-          </p:cNvPr>
-          <p:cNvSpPr>
-            <a:spLocks noGrp="1"/>
-          </p:cNvSpPr>
-          <p:nvPr>
-            <p:ph idx="1"/>
-          </p:nvPr>
-        </p:nvSpPr>
-        <p:spPr>
-          <a:xfrm>
-            <a:off x="7436887" y="2131137"/>
-            <a:ext cx="4663477" cy="5421936"/>
-          </a:xfrm>
-        </p:spPr>
-        <p:txBody>
-          <a:bodyPr/>
-          <a:lstStyle/>
-          <a:p>
-            <a:pPr algn="just"/>
-            <a:r>
-              <a:rPr lang="en-US" sz="1800" dirty="0"/>
-              <a:t>This indicates that the relationship </a:t>
-            </a:r>
-            <a:r>
-              <a:rPr lang="en-US" sz="1800" b="1" dirty="0"/>
-              <a:t>is not linear </a:t>
-            </a:r>
-          </a:p>
-          <a:p>
-            <a:pPr algn="just"/>
-            <a:r>
-              <a:rPr lang="en-IN" sz="1800" dirty="0"/>
-              <a:t>If we were to build a regression model, we would need to look at non-linear models or exclude the temperature variable due to non-linearity</a:t>
-            </a:r>
-          </a:p>
-          <a:p>
-            <a:pPr algn="just"/>
-            <a:endParaRPr lang="en-US" sz="1800" dirty="0"/>
-          </a:p>
-        </p:txBody>
-      </p:sp>
-      <p:sp>
-        <p:nvSpPr>
-          <p:cNvPr id="4" name="Slide Number Placeholder 3">
-            <a:extLst>
-              <a:ext uri="{FF2B5EF4-FFF2-40B4-BE49-F238E27FC236}">
-                <a16:creationId xmlns:a16="http://schemas.microsoft.com/office/drawing/2014/main" id="{26A05CBE-BD42-D6AA-7874-9420A4C766AC}"/>
-              </a:ext>
-            </a:extLst>
-          </p:cNvPr>
-          <p:cNvSpPr>
-            <a:spLocks noGrp="1"/>
-          </p:cNvSpPr>
-          <p:nvPr>
-            <p:ph type="sldNum" sz="quarter" idx="12"/>
-          </p:nvPr>
-        </p:nvSpPr>
-        <p:spPr/>
-        <p:txBody>
-          <a:bodyPr/>
-          <a:lstStyle/>
-          <a:p>
-            <a:fld id="{5C35FCF4-C3EF-BD43-82E0-05BC237DAD2A}" type="slidenum">
-              <a:rPr lang="en-US" smtClean="0"/>
-              <a:pPr/>
-              <a:t>6</a:t>
-            </a:fld>
-            <a:endParaRPr lang="en-US" dirty="0"/>
-          </a:p>
-        </p:txBody>
-      </p:sp>
-      <p:pic>
-        <p:nvPicPr>
-          <p:cNvPr id="6" name="Picture 5">
-            <a:extLst>
-              <a:ext uri="{FF2B5EF4-FFF2-40B4-BE49-F238E27FC236}">
-                <a16:creationId xmlns:a16="http://schemas.microsoft.com/office/drawing/2014/main" id="{1B4E3A50-80E6-6BF5-4E1B-0B5301EA9F8C}"/>
-              </a:ext>
-            </a:extLst>
-          </p:cNvPr>
-          <p:cNvPicPr>
-            <a:picLocks noChangeAspect="1"/>
-          </p:cNvPicPr>
-          <p:nvPr/>
-        </p:nvPicPr>
-        <p:blipFill>
-          <a:blip r:embed="rId2"/>
-          <a:stretch>
-            <a:fillRect/>
-          </a:stretch>
-        </p:blipFill>
-        <p:spPr>
-          <a:xfrm>
-            <a:off x="91635" y="1544647"/>
-            <a:ext cx="7345253" cy="3932610"/>
-          </a:xfrm>
-          <a:prstGeom prst="rect">
-            <a:avLst/>
-          </a:prstGeom>
-        </p:spPr>
-      </p:pic>
-      <p:sp>
-        <p:nvSpPr>
-          <p:cNvPr id="2" name="Title 1">
-            <a:extLst>
-              <a:ext uri="{FF2B5EF4-FFF2-40B4-BE49-F238E27FC236}">
-                <a16:creationId xmlns:a16="http://schemas.microsoft.com/office/drawing/2014/main" id="{35989FBF-1934-0B57-EF44-BB45263C2645}"/>
-              </a:ext>
-            </a:extLst>
-          </p:cNvPr>
-          <p:cNvSpPr>
-            <a:spLocks noGrp="1"/>
-          </p:cNvSpPr>
-          <p:nvPr>
-            <p:ph type="title"/>
-          </p:nvPr>
-        </p:nvSpPr>
-        <p:spPr>
-          <a:xfrm>
-            <a:off x="562628" y="463968"/>
-            <a:ext cx="9724372" cy="1033398"/>
-          </a:xfrm>
-        </p:spPr>
-        <p:txBody>
-          <a:bodyPr/>
-          <a:lstStyle/>
-          <a:p>
-            <a:r>
-              <a:rPr lang="en-US" dirty="0"/>
-              <a:t>Temperature vs Generation (MWh)</a:t>
-            </a:r>
-            <a:endParaRPr lang="en-IN" dirty="0"/>
-          </a:p>
-        </p:txBody>
-      </p:sp>
-    </p:spTree>
-    <p:extLst>
-      <p:ext uri="{BB962C8B-B14F-4D97-AF65-F5344CB8AC3E}">
-        <p14:creationId xmlns:p14="http://schemas.microsoft.com/office/powerpoint/2010/main" val="2670562210"/>
-      </p:ext>
-    </p:extLst>
-  </p:cSld>
-  <p:clrMapOvr>
-    <a:masterClrMapping/>
-  </p:clrMapOvr>
-</p:sld>
-</file>
-
-<file path=ppt/slides/slide7.xml><?xml version="1.0" encoding="utf-8"?>
-<p:sld xmlns:a="http://schemas.openxmlformats.org/drawingml/2006/main" xmlns:r="http://schemas.openxmlformats.org/officeDocument/2006/relationships" xmlns:p="http://schemas.openxmlformats.org/presentationml/2006/main">
-  <p:cSld>
-    <p:spTree>
-      <p:nvGrpSpPr>
-        <p:cNvPr id="1" name=""/>
-        <p:cNvGrpSpPr/>
-        <p:nvPr/>
-      </p:nvGrpSpPr>
-      <p:grpSpPr>
-        <a:xfrm>
-          <a:off x="0" y="0"/>
-          <a:ext cx="0" cy="0"/>
-          <a:chOff x="0" y="0"/>
-          <a:chExt cx="0" cy="0"/>
-        </a:xfrm>
-      </p:grpSpPr>
-      <p:sp>
-        <p:nvSpPr>
-          <p:cNvPr id="2" name="Title 1">
-            <a:extLst>
-              <a:ext uri="{FF2B5EF4-FFF2-40B4-BE49-F238E27FC236}">
-                <a16:creationId xmlns:a16="http://schemas.microsoft.com/office/drawing/2014/main" id="{528B9F04-3F4A-E9A4-6287-5886EF5412A9}"/>
-              </a:ext>
-            </a:extLst>
-          </p:cNvPr>
-          <p:cNvSpPr>
-            <a:spLocks noGrp="1"/>
-          </p:cNvSpPr>
-          <p:nvPr>
-            <p:ph type="title"/>
-          </p:nvPr>
-        </p:nvSpPr>
-        <p:spPr/>
-        <p:txBody>
-          <a:bodyPr/>
-          <a:lstStyle/>
-          <a:p>
-            <a:r>
-              <a:rPr lang="en-US" dirty="0"/>
-              <a:t>Statistical Modelling (On Course)</a:t>
-            </a:r>
-          </a:p>
-        </p:txBody>
-      </p:sp>
-      <p:sp>
-        <p:nvSpPr>
-          <p:cNvPr id="3" name="Content Placeholder 2">
-            <a:extLst>
-              <a:ext uri="{FF2B5EF4-FFF2-40B4-BE49-F238E27FC236}">
-                <a16:creationId xmlns:a16="http://schemas.microsoft.com/office/drawing/2014/main" id="{B5895856-7EEB-5A8E-8F5E-424159E970F8}"/>
-              </a:ext>
-            </a:extLst>
-          </p:cNvPr>
-          <p:cNvSpPr>
-            <a:spLocks noGrp="1"/>
-          </p:cNvSpPr>
-          <p:nvPr>
-            <p:ph idx="1"/>
-          </p:nvPr>
-        </p:nvSpPr>
-        <p:spPr>
-          <a:xfrm>
-            <a:off x="443755" y="1497366"/>
-            <a:ext cx="7852519" cy="2012421"/>
-          </a:xfrm>
-        </p:spPr>
-        <p:txBody>
-          <a:bodyPr/>
-          <a:lstStyle/>
-          <a:p>
-            <a:pPr algn="just"/>
-            <a:r>
-              <a:rPr lang="en-US" sz="1600" b="1" dirty="0"/>
-              <a:t>Demand Prediction: </a:t>
-            </a:r>
-            <a:r>
-              <a:rPr lang="en-US" sz="1600" dirty="0"/>
-              <a:t>After combining all the datasets and adjusting with population growth, we could have a good prediction of the Demand – </a:t>
-            </a:r>
-          </a:p>
-          <a:p>
-            <a:pPr algn="just"/>
-            <a:r>
-              <a:rPr lang="en-US" sz="1600" dirty="0"/>
-              <a:t>We used Multi Linear Model and obtained an Adjusted R</a:t>
-            </a:r>
-            <a:r>
-              <a:rPr lang="en-US" sz="1600" baseline="30000" dirty="0"/>
-              <a:t>2</a:t>
-            </a:r>
-            <a:r>
-              <a:rPr lang="en-US" sz="1600" dirty="0"/>
-              <a:t> of 0.699.</a:t>
-            </a:r>
-            <a:endParaRPr lang="en-US" sz="1600" b="1" dirty="0"/>
-          </a:p>
-        </p:txBody>
-      </p:sp>
-      <p:sp>
-        <p:nvSpPr>
-          <p:cNvPr id="4" name="Slide Number Placeholder 3">
-            <a:extLst>
-              <a:ext uri="{FF2B5EF4-FFF2-40B4-BE49-F238E27FC236}">
-                <a16:creationId xmlns:a16="http://schemas.microsoft.com/office/drawing/2014/main" id="{A23862DE-0874-F1E7-ED0F-E09754AE3C2D}"/>
-              </a:ext>
-            </a:extLst>
-          </p:cNvPr>
-          <p:cNvSpPr>
-            <a:spLocks noGrp="1"/>
-          </p:cNvSpPr>
-          <p:nvPr>
-            <p:ph type="sldNum" sz="quarter" idx="12"/>
-          </p:nvPr>
-        </p:nvSpPr>
-        <p:spPr/>
-        <p:txBody>
-          <a:bodyPr/>
-          <a:lstStyle/>
-          <a:p>
-            <a:fld id="{5C35FCF4-C3EF-BD43-82E0-05BC237DAD2A}" type="slidenum">
-              <a:rPr lang="en-US" smtClean="0"/>
-              <a:pPr/>
-              <a:t>7</a:t>
-            </a:fld>
-            <a:endParaRPr lang="en-US" dirty="0"/>
-          </a:p>
-        </p:txBody>
-      </p:sp>
-      <p:pic>
-        <p:nvPicPr>
-          <p:cNvPr id="6" name="Picture 5">
-            <a:extLst>
-              <a:ext uri="{FF2B5EF4-FFF2-40B4-BE49-F238E27FC236}">
-                <a16:creationId xmlns:a16="http://schemas.microsoft.com/office/drawing/2014/main" id="{B9C26AC8-8C0C-EFFC-F555-F0D91D403A2E}"/>
-              </a:ext>
-            </a:extLst>
-          </p:cNvPr>
-          <p:cNvPicPr>
-            <a:picLocks noChangeAspect="1"/>
-          </p:cNvPicPr>
-          <p:nvPr/>
-        </p:nvPicPr>
-        <p:blipFill>
-          <a:blip r:embed="rId2"/>
-          <a:stretch>
-            <a:fillRect/>
-          </a:stretch>
-        </p:blipFill>
-        <p:spPr>
-          <a:xfrm>
-            <a:off x="295928" y="2683697"/>
-            <a:ext cx="5396667" cy="2676937"/>
-          </a:xfrm>
-          <a:prstGeom prst="rect">
-            <a:avLst/>
-          </a:prstGeom>
-        </p:spPr>
-      </p:pic>
-      <p:pic>
-        <p:nvPicPr>
-          <p:cNvPr id="10" name="Picture 9">
-            <a:extLst>
-              <a:ext uri="{FF2B5EF4-FFF2-40B4-BE49-F238E27FC236}">
-                <a16:creationId xmlns:a16="http://schemas.microsoft.com/office/drawing/2014/main" id="{994D7A1D-B3B1-6846-05E8-69372A46025A}"/>
-              </a:ext>
-            </a:extLst>
-          </p:cNvPr>
-          <p:cNvPicPr>
-            <a:picLocks noChangeAspect="1"/>
-          </p:cNvPicPr>
-          <p:nvPr/>
-        </p:nvPicPr>
-        <p:blipFill>
-          <a:blip r:embed="rId3"/>
-          <a:stretch>
-            <a:fillRect/>
-          </a:stretch>
-        </p:blipFill>
-        <p:spPr>
-          <a:xfrm>
-            <a:off x="5949586" y="2681442"/>
-            <a:ext cx="5527386" cy="2679192"/>
-          </a:xfrm>
-          <a:prstGeom prst="rect">
-            <a:avLst/>
-          </a:prstGeom>
-        </p:spPr>
-      </p:pic>
-    </p:spTree>
-    <p:extLst>
-      <p:ext uri="{BB962C8B-B14F-4D97-AF65-F5344CB8AC3E}">
-        <p14:creationId xmlns:p14="http://schemas.microsoft.com/office/powerpoint/2010/main" val="4084291619"/>
-      </p:ext>
-    </p:extLst>
-  </p:cSld>
-  <p:clrMapOvr>
-    <a:masterClrMapping/>
-  </p:clrMapOvr>
-</p:sld>
-</file>
-
-<file path=ppt/slides/slide8.xml><?xml version="1.0" encoding="utf-8"?>
-<p:sld xmlns:a="http://schemas.openxmlformats.org/drawingml/2006/main" xmlns:r="http://schemas.openxmlformats.org/officeDocument/2006/relationships" xmlns:p="http://schemas.openxmlformats.org/presentationml/2006/main">
-  <p:cSld>
-    <p:spTree>
-      <p:nvGrpSpPr>
         <p:cNvPr id="1" name="">
           <a:extLst>
             <a:ext uri="{FF2B5EF4-FFF2-40B4-BE49-F238E27FC236}">
@@ -9516,7 +7507,7 @@
             <a:fld id="{5C35FCF4-C3EF-BD43-82E0-05BC237DAD2A}" type="slidenum">
               <a:rPr lang="en-US" smtClean="0"/>
               <a:pPr/>
-              <a:t>8</a:t>
+              <a:t>10</a:t>
             </a:fld>
             <a:endParaRPr lang="en-US" dirty="0"/>
           </a:p>
@@ -9595,7 +7586,7 @@
 </p:sld>
 </file>
 
-<file path=ppt/slides/slide9.xml><?xml version="1.0" encoding="utf-8"?>
+<file path=ppt/slides/slide11.xml><?xml version="1.0" encoding="utf-8"?>
 <p:sld xmlns:a="http://schemas.openxmlformats.org/drawingml/2006/main" xmlns:r="http://schemas.openxmlformats.org/officeDocument/2006/relationships" xmlns:p="http://schemas.openxmlformats.org/presentationml/2006/main">
   <p:cSld>
     <p:spTree>
@@ -9671,7 +7662,7 @@
             <a:fld id="{5C35FCF4-C3EF-BD43-82E0-05BC237DAD2A}" type="slidenum">
               <a:rPr lang="en-US" smtClean="0"/>
               <a:pPr/>
-              <a:t>9</a:t>
+              <a:t>11</a:t>
             </a:fld>
             <a:endParaRPr lang="en-US" dirty="0"/>
           </a:p>
@@ -10337,6 +8328,2520 @@
     <p:extLst>
       <p:ext uri="{BB962C8B-B14F-4D97-AF65-F5344CB8AC3E}">
         <p14:creationId xmlns:p14="http://schemas.microsoft.com/office/powerpoint/2010/main" val="1150203873"/>
+      </p:ext>
+    </p:extLst>
+  </p:cSld>
+  <p:clrMapOvr>
+    <a:masterClrMapping/>
+  </p:clrMapOvr>
+</p:sld>
+</file>
+
+<file path=ppt/slides/slide12.xml><?xml version="1.0" encoding="utf-8"?>
+<p:sld xmlns:a="http://schemas.openxmlformats.org/drawingml/2006/main" xmlns:r="http://schemas.openxmlformats.org/officeDocument/2006/relationships" xmlns:p="http://schemas.openxmlformats.org/presentationml/2006/main">
+  <p:cSld>
+    <p:spTree>
+      <p:nvGrpSpPr>
+        <p:cNvPr id="1" name=""/>
+        <p:cNvGrpSpPr/>
+        <p:nvPr/>
+      </p:nvGrpSpPr>
+      <p:grpSpPr>
+        <a:xfrm>
+          <a:off x="0" y="0"/>
+          <a:ext cx="0" cy="0"/>
+          <a:chOff x="0" y="0"/>
+          <a:chExt cx="0" cy="0"/>
+        </a:xfrm>
+      </p:grpSpPr>
+      <p:sp>
+        <p:nvSpPr>
+          <p:cNvPr id="2" name="Title 1">
+            <a:extLst>
+              <a:ext uri="{FF2B5EF4-FFF2-40B4-BE49-F238E27FC236}">
+                <a16:creationId xmlns:a16="http://schemas.microsoft.com/office/drawing/2014/main" id="{4C48F3D9-632A-4572-7B67-691790442369}"/>
+              </a:ext>
+            </a:extLst>
+          </p:cNvPr>
+          <p:cNvSpPr>
+            <a:spLocks noGrp="1"/>
+          </p:cNvSpPr>
+          <p:nvPr>
+            <p:ph type="title"/>
+          </p:nvPr>
+        </p:nvSpPr>
+        <p:spPr/>
+        <p:txBody>
+          <a:bodyPr>
+            <a:normAutofit fontScale="90000"/>
+          </a:bodyPr>
+          <a:lstStyle/>
+          <a:p>
+            <a:r>
+              <a:rPr lang="en-US" dirty="0"/>
+              <a:t>What are the different energy generation sources?	</a:t>
+            </a:r>
+            <a:endParaRPr lang="en-IN" dirty="0"/>
+          </a:p>
+        </p:txBody>
+      </p:sp>
+      <p:sp>
+        <p:nvSpPr>
+          <p:cNvPr id="3" name="Content Placeholder 2">
+            <a:extLst>
+              <a:ext uri="{FF2B5EF4-FFF2-40B4-BE49-F238E27FC236}">
+                <a16:creationId xmlns:a16="http://schemas.microsoft.com/office/drawing/2014/main" id="{1E250616-F6CA-6D9D-0300-7150613BA91A}"/>
+              </a:ext>
+            </a:extLst>
+          </p:cNvPr>
+          <p:cNvSpPr>
+            <a:spLocks noGrp="1"/>
+          </p:cNvSpPr>
+          <p:nvPr>
+            <p:ph idx="1"/>
+          </p:nvPr>
+        </p:nvSpPr>
+        <p:spPr>
+          <a:xfrm>
+            <a:off x="334028" y="1634229"/>
+            <a:ext cx="4914628" cy="4115669"/>
+          </a:xfrm>
+        </p:spPr>
+        <p:txBody>
+          <a:bodyPr/>
+          <a:lstStyle/>
+          <a:p>
+            <a:pPr algn="just">
+              <a:lnSpc>
+                <a:spcPct val="100000"/>
+              </a:lnSpc>
+              <a:spcAft>
+                <a:spcPts val="1000"/>
+              </a:spcAft>
+            </a:pPr>
+            <a:r>
+              <a:rPr lang="en-US" sz="1800" b="0" i="0" dirty="0">
+                <a:effectLst/>
+                <a:latin typeface="system-ui"/>
+              </a:rPr>
+              <a:t>Generation sources include </a:t>
+            </a:r>
+            <a:r>
+              <a:rPr lang="en-US" sz="1800" b="1" i="0" dirty="0">
+                <a:effectLst/>
+                <a:latin typeface="system-ui"/>
+              </a:rPr>
+              <a:t>natural gas plants </a:t>
+            </a:r>
+            <a:r>
+              <a:rPr lang="en-US" sz="1800" b="0" i="0" dirty="0">
+                <a:effectLst/>
+                <a:latin typeface="system-ui"/>
+              </a:rPr>
+              <a:t>(simple, combined or cogeneration cycles), </a:t>
+            </a:r>
+            <a:r>
+              <a:rPr lang="en-US" sz="1800" b="1" i="0" dirty="0">
+                <a:effectLst/>
+                <a:latin typeface="system-ui"/>
+              </a:rPr>
+              <a:t>wind farms, solar farms</a:t>
+            </a:r>
+            <a:r>
+              <a:rPr lang="en-US" sz="1800" b="0" i="0" dirty="0">
+                <a:effectLst/>
+                <a:latin typeface="system-ui"/>
+              </a:rPr>
+              <a:t>, among others.</a:t>
+            </a:r>
+          </a:p>
+          <a:p>
+            <a:pPr algn="just">
+              <a:lnSpc>
+                <a:spcPct val="100000"/>
+              </a:lnSpc>
+              <a:spcAft>
+                <a:spcPts val="1000"/>
+              </a:spcAft>
+            </a:pPr>
+            <a:r>
+              <a:rPr lang="en-US" sz="1800" dirty="0">
+                <a:latin typeface="system-ui"/>
+              </a:rPr>
+              <a:t>Over the past years, green sources such as Wind and Solar have been gaining momentum, but </a:t>
+            </a:r>
+            <a:r>
+              <a:rPr lang="en-US" sz="1800" b="1" dirty="0">
+                <a:latin typeface="system-ui"/>
+              </a:rPr>
+              <a:t>Cogeneration still owns the largest share.</a:t>
+            </a:r>
+            <a:endParaRPr lang="en-US" sz="1800" b="1" i="0" dirty="0">
+              <a:effectLst/>
+              <a:latin typeface="system-ui"/>
+            </a:endParaRPr>
+          </a:p>
+          <a:p>
+            <a:pPr algn="just"/>
+            <a:r>
+              <a:rPr lang="en-IN" sz="1800" b="1" dirty="0"/>
+              <a:t>Natural Gas plants </a:t>
+            </a:r>
+            <a:r>
+              <a:rPr lang="en-IN" sz="1800" dirty="0"/>
+              <a:t>are responsible for almost ¾ of total generation.</a:t>
+            </a:r>
+          </a:p>
+          <a:p>
+            <a:pPr algn="just"/>
+            <a:r>
+              <a:rPr lang="en-IN" sz="1800" b="1" dirty="0"/>
+              <a:t>Coal was rapidly phased out </a:t>
+            </a:r>
+            <a:r>
+              <a:rPr lang="en-IN" sz="1800" dirty="0"/>
+              <a:t>(from 32% in 2015 to 2% in 2024)</a:t>
+            </a:r>
+          </a:p>
+        </p:txBody>
+      </p:sp>
+      <p:sp>
+        <p:nvSpPr>
+          <p:cNvPr id="4" name="Slide Number Placeholder 3">
+            <a:extLst>
+              <a:ext uri="{FF2B5EF4-FFF2-40B4-BE49-F238E27FC236}">
+                <a16:creationId xmlns:a16="http://schemas.microsoft.com/office/drawing/2014/main" id="{CB58AD21-9246-FAED-ABF6-D4A8CF6E3127}"/>
+              </a:ext>
+            </a:extLst>
+          </p:cNvPr>
+          <p:cNvSpPr>
+            <a:spLocks noGrp="1"/>
+          </p:cNvSpPr>
+          <p:nvPr>
+            <p:ph type="sldNum" sz="quarter" idx="12"/>
+          </p:nvPr>
+        </p:nvSpPr>
+        <p:spPr/>
+        <p:txBody>
+          <a:bodyPr/>
+          <a:lstStyle/>
+          <a:p>
+            <a:fld id="{5C35FCF4-C3EF-BD43-82E0-05BC237DAD2A}" type="slidenum">
+              <a:rPr lang="en-US" smtClean="0"/>
+              <a:pPr/>
+              <a:t>12</a:t>
+            </a:fld>
+            <a:endParaRPr lang="en-US" dirty="0"/>
+          </a:p>
+        </p:txBody>
+      </p:sp>
+      <p:graphicFrame>
+        <p:nvGraphicFramePr>
+          <p:cNvPr id="7" name="Chart 6">
+            <a:extLst>
+              <a:ext uri="{FF2B5EF4-FFF2-40B4-BE49-F238E27FC236}">
+                <a16:creationId xmlns:a16="http://schemas.microsoft.com/office/drawing/2014/main" id="{DF8ED046-7DE7-B2C6-71C8-928D5924758E}"/>
+              </a:ext>
+            </a:extLst>
+          </p:cNvPr>
+          <p:cNvGraphicFramePr>
+            <a:graphicFrameLocks/>
+          </p:cNvGraphicFramePr>
+          <p:nvPr>
+            <p:extLst>
+              <p:ext uri="{D42A27DB-BD31-4B8C-83A1-F6EECF244321}">
+                <p14:modId xmlns:p14="http://schemas.microsoft.com/office/powerpoint/2010/main" val="2621695995"/>
+              </p:ext>
+            </p:extLst>
+          </p:nvPr>
+        </p:nvGraphicFramePr>
+        <p:xfrm>
+          <a:off x="5558931" y="2320463"/>
+          <a:ext cx="6385560" cy="2743200"/>
+        </p:xfrm>
+        <a:graphic>
+          <a:graphicData uri="http://schemas.openxmlformats.org/drawingml/2006/chart">
+            <c:chart xmlns:c="http://schemas.openxmlformats.org/drawingml/2006/chart" xmlns:r="http://schemas.openxmlformats.org/officeDocument/2006/relationships" r:id="rId2"/>
+          </a:graphicData>
+        </a:graphic>
+      </p:graphicFrame>
+    </p:spTree>
+    <p:extLst>
+      <p:ext uri="{BB962C8B-B14F-4D97-AF65-F5344CB8AC3E}">
+        <p14:creationId xmlns:p14="http://schemas.microsoft.com/office/powerpoint/2010/main" val="691535690"/>
+      </p:ext>
+    </p:extLst>
+  </p:cSld>
+  <p:clrMapOvr>
+    <a:masterClrMapping/>
+  </p:clrMapOvr>
+</p:sld>
+</file>
+
+<file path=ppt/slides/slide13.xml><?xml version="1.0" encoding="utf-8"?>
+<p:sld xmlns:a="http://schemas.openxmlformats.org/drawingml/2006/main" xmlns:r="http://schemas.openxmlformats.org/officeDocument/2006/relationships" xmlns:p="http://schemas.openxmlformats.org/presentationml/2006/main" show="0">
+  <p:cSld>
+    <p:spTree>
+      <p:nvGrpSpPr>
+        <p:cNvPr id="1" name=""/>
+        <p:cNvGrpSpPr/>
+        <p:nvPr/>
+      </p:nvGrpSpPr>
+      <p:grpSpPr>
+        <a:xfrm>
+          <a:off x="0" y="0"/>
+          <a:ext cx="0" cy="0"/>
+          <a:chOff x="0" y="0"/>
+          <a:chExt cx="0" cy="0"/>
+        </a:xfrm>
+      </p:grpSpPr>
+      <p:sp>
+        <p:nvSpPr>
+          <p:cNvPr id="2" name="Title 1">
+            <a:extLst>
+              <a:ext uri="{FF2B5EF4-FFF2-40B4-BE49-F238E27FC236}">
+                <a16:creationId xmlns:a16="http://schemas.microsoft.com/office/drawing/2014/main" id="{1A5B58A0-C0D0-59C3-469C-A33F5AAA8312}"/>
+              </a:ext>
+            </a:extLst>
+          </p:cNvPr>
+          <p:cNvSpPr>
+            <a:spLocks noGrp="1"/>
+          </p:cNvSpPr>
+          <p:nvPr>
+            <p:ph type="title"/>
+          </p:nvPr>
+        </p:nvSpPr>
+        <p:spPr/>
+        <p:txBody>
+          <a:bodyPr/>
+          <a:lstStyle/>
+          <a:p>
+            <a:r>
+              <a:rPr lang="en-US" dirty="0"/>
+              <a:t>The Datasets</a:t>
+            </a:r>
+            <a:endParaRPr lang="en-IN" dirty="0"/>
+          </a:p>
+        </p:txBody>
+      </p:sp>
+      <p:sp>
+        <p:nvSpPr>
+          <p:cNvPr id="3" name="Content Placeholder 2">
+            <a:extLst>
+              <a:ext uri="{FF2B5EF4-FFF2-40B4-BE49-F238E27FC236}">
+                <a16:creationId xmlns:a16="http://schemas.microsoft.com/office/drawing/2014/main" id="{6E1284D0-56B0-247B-E853-9F755AF7D4FD}"/>
+              </a:ext>
+            </a:extLst>
+          </p:cNvPr>
+          <p:cNvSpPr>
+            <a:spLocks noGrp="1"/>
+          </p:cNvSpPr>
+          <p:nvPr>
+            <p:ph idx="1"/>
+          </p:nvPr>
+        </p:nvSpPr>
+        <p:spPr/>
+        <p:txBody>
+          <a:bodyPr/>
+          <a:lstStyle/>
+          <a:p>
+            <a:pPr marL="0" indent="0">
+              <a:buNone/>
+            </a:pPr>
+            <a:endParaRPr lang="en-US" dirty="0"/>
+          </a:p>
+          <a:p>
+            <a:endParaRPr lang="en-IN" dirty="0"/>
+          </a:p>
+        </p:txBody>
+      </p:sp>
+      <p:sp>
+        <p:nvSpPr>
+          <p:cNvPr id="4" name="Slide Number Placeholder 3">
+            <a:extLst>
+              <a:ext uri="{FF2B5EF4-FFF2-40B4-BE49-F238E27FC236}">
+                <a16:creationId xmlns:a16="http://schemas.microsoft.com/office/drawing/2014/main" id="{C6A15AAA-0CD0-F9C6-7C80-DC730EB0A004}"/>
+              </a:ext>
+            </a:extLst>
+          </p:cNvPr>
+          <p:cNvSpPr>
+            <a:spLocks noGrp="1"/>
+          </p:cNvSpPr>
+          <p:nvPr>
+            <p:ph type="sldNum" sz="quarter" idx="12"/>
+          </p:nvPr>
+        </p:nvSpPr>
+        <p:spPr/>
+        <p:txBody>
+          <a:bodyPr/>
+          <a:lstStyle/>
+          <a:p>
+            <a:fld id="{5C35FCF4-C3EF-BD43-82E0-05BC237DAD2A}" type="slidenum">
+              <a:rPr lang="en-US" smtClean="0"/>
+              <a:pPr/>
+              <a:t>13</a:t>
+            </a:fld>
+            <a:endParaRPr lang="en-US" dirty="0"/>
+          </a:p>
+        </p:txBody>
+      </p:sp>
+      <p:graphicFrame>
+        <p:nvGraphicFramePr>
+          <p:cNvPr id="7" name="Diagram 6">
+            <a:extLst>
+              <a:ext uri="{FF2B5EF4-FFF2-40B4-BE49-F238E27FC236}">
+                <a16:creationId xmlns:a16="http://schemas.microsoft.com/office/drawing/2014/main" id="{84D7C596-CBB8-AF14-38B2-574468B34F80}"/>
+              </a:ext>
+            </a:extLst>
+          </p:cNvPr>
+          <p:cNvGraphicFramePr/>
+          <p:nvPr>
+            <p:extLst>
+              <p:ext uri="{D42A27DB-BD31-4B8C-83A1-F6EECF244321}">
+                <p14:modId xmlns:p14="http://schemas.microsoft.com/office/powerpoint/2010/main" val="3257354709"/>
+              </p:ext>
+            </p:extLst>
+          </p:nvPr>
+        </p:nvGraphicFramePr>
+        <p:xfrm>
+          <a:off x="2032000" y="1628503"/>
+          <a:ext cx="7216503" cy="4509830"/>
+        </p:xfrm>
+        <a:graphic>
+          <a:graphicData uri="http://schemas.openxmlformats.org/drawingml/2006/diagram">
+            <dgm:relIds xmlns:dgm="http://schemas.openxmlformats.org/drawingml/2006/diagram" xmlns:r="http://schemas.openxmlformats.org/officeDocument/2006/relationships" r:dm="rId2" r:lo="rId3" r:qs="rId4" r:cs="rId5"/>
+          </a:graphicData>
+        </a:graphic>
+      </p:graphicFrame>
+    </p:spTree>
+    <p:extLst>
+      <p:ext uri="{BB962C8B-B14F-4D97-AF65-F5344CB8AC3E}">
+        <p14:creationId xmlns:p14="http://schemas.microsoft.com/office/powerpoint/2010/main" val="4275676341"/>
+      </p:ext>
+    </p:extLst>
+  </p:cSld>
+  <p:clrMapOvr>
+    <a:masterClrMapping/>
+  </p:clrMapOvr>
+</p:sld>
+</file>
+
+<file path=ppt/slides/slide14.xml><?xml version="1.0" encoding="utf-8"?>
+<p:sld xmlns:a="http://schemas.openxmlformats.org/drawingml/2006/main" xmlns:r="http://schemas.openxmlformats.org/officeDocument/2006/relationships" xmlns:p="http://schemas.openxmlformats.org/presentationml/2006/main" show="0">
+  <p:cSld>
+    <p:spTree>
+      <p:nvGrpSpPr>
+        <p:cNvPr id="1" name=""/>
+        <p:cNvGrpSpPr/>
+        <p:nvPr/>
+      </p:nvGrpSpPr>
+      <p:grpSpPr>
+        <a:xfrm>
+          <a:off x="0" y="0"/>
+          <a:ext cx="0" cy="0"/>
+          <a:chOff x="0" y="0"/>
+          <a:chExt cx="0" cy="0"/>
+        </a:xfrm>
+      </p:grpSpPr>
+      <p:sp>
+        <p:nvSpPr>
+          <p:cNvPr id="3" name="Content Placeholder 2">
+            <a:extLst>
+              <a:ext uri="{FF2B5EF4-FFF2-40B4-BE49-F238E27FC236}">
+                <a16:creationId xmlns:a16="http://schemas.microsoft.com/office/drawing/2014/main" id="{F703D7B7-61CF-4E04-321E-7E750ADD5AC6}"/>
+              </a:ext>
+            </a:extLst>
+          </p:cNvPr>
+          <p:cNvSpPr>
+            <a:spLocks noGrp="1"/>
+          </p:cNvSpPr>
+          <p:nvPr>
+            <p:ph idx="1"/>
+          </p:nvPr>
+        </p:nvSpPr>
+        <p:spPr>
+          <a:xfrm>
+            <a:off x="562628" y="583475"/>
+            <a:ext cx="9724372" cy="5305390"/>
+          </a:xfrm>
+        </p:spPr>
+        <p:txBody>
+          <a:bodyPr/>
+          <a:lstStyle/>
+          <a:p>
+            <a:r>
+              <a:rPr lang="en-US" sz="2400" dirty="0"/>
+              <a:t>There are total of 5 datasets:  Demand, temperature, gas price, generation and price.</a:t>
+            </a:r>
+          </a:p>
+          <a:p>
+            <a:pPr marL="457200" indent="-457200">
+              <a:buFont typeface="+mj-lt"/>
+              <a:buAutoNum type="arabicPeriod"/>
+            </a:pPr>
+            <a:r>
+              <a:rPr lang="en-US" sz="2400" dirty="0"/>
+              <a:t>Demand Dataset - The demand datasets consists of Alberta’s internal load/Demand consisting of the total hourly demand in MW for the entire Province combined with spot price and gas price</a:t>
+            </a:r>
+          </a:p>
+          <a:p>
+            <a:r>
+              <a:rPr lang="en-US" sz="2400" dirty="0"/>
+              <a:t>Visualizing the demand vs price, we can obtain an understanding of how an increase population increases the price</a:t>
+            </a:r>
+            <a:endParaRPr lang="en-IN" sz="2400" dirty="0"/>
+          </a:p>
+        </p:txBody>
+      </p:sp>
+      <p:sp>
+        <p:nvSpPr>
+          <p:cNvPr id="4" name="Slide Number Placeholder 3">
+            <a:extLst>
+              <a:ext uri="{FF2B5EF4-FFF2-40B4-BE49-F238E27FC236}">
+                <a16:creationId xmlns:a16="http://schemas.microsoft.com/office/drawing/2014/main" id="{684F2A64-15ED-FE2A-F9A7-D98DC7CB7165}"/>
+              </a:ext>
+            </a:extLst>
+          </p:cNvPr>
+          <p:cNvSpPr>
+            <a:spLocks noGrp="1"/>
+          </p:cNvSpPr>
+          <p:nvPr>
+            <p:ph type="sldNum" sz="quarter" idx="12"/>
+          </p:nvPr>
+        </p:nvSpPr>
+        <p:spPr/>
+        <p:txBody>
+          <a:bodyPr/>
+          <a:lstStyle/>
+          <a:p>
+            <a:fld id="{5C35FCF4-C3EF-BD43-82E0-05BC237DAD2A}" type="slidenum">
+              <a:rPr lang="en-US" smtClean="0"/>
+              <a:pPr/>
+              <a:t>14</a:t>
+            </a:fld>
+            <a:endParaRPr lang="en-US" dirty="0"/>
+          </a:p>
+        </p:txBody>
+      </p:sp>
+      <p:pic>
+        <p:nvPicPr>
+          <p:cNvPr id="5" name="Graphic 4" descr="Business Growth with solid fill">
+            <a:extLst>
+              <a:ext uri="{FF2B5EF4-FFF2-40B4-BE49-F238E27FC236}">
+                <a16:creationId xmlns:a16="http://schemas.microsoft.com/office/drawing/2014/main" id="{A11FA293-6C58-A6C9-9C0E-EFDD9A2AE410}"/>
+              </a:ext>
+            </a:extLst>
+          </p:cNvPr>
+          <p:cNvPicPr>
+            <a:picLocks noChangeAspect="1"/>
+          </p:cNvPicPr>
+          <p:nvPr/>
+        </p:nvPicPr>
+        <p:blipFill>
+          <a:blip r:embed="rId2">
+            <a:extLst>
+              <a:ext uri="{96DAC541-7B7A-43D3-8B79-37D633B846F1}">
+                <asvg:svgBlip xmlns:asvg="http://schemas.microsoft.com/office/drawing/2016/SVG/main" r:embed="rId3"/>
+              </a:ext>
+            </a:extLst>
+          </a:blip>
+          <a:stretch>
+            <a:fillRect/>
+          </a:stretch>
+        </p:blipFill>
+        <p:spPr>
+          <a:xfrm>
+            <a:off x="843063" y="3866023"/>
+            <a:ext cx="2094690" cy="2094690"/>
+          </a:xfrm>
+          <a:prstGeom prst="rect">
+            <a:avLst/>
+          </a:prstGeom>
+        </p:spPr>
+      </p:pic>
+      <p:pic>
+        <p:nvPicPr>
+          <p:cNvPr id="7" name="Picture 6">
+            <a:extLst>
+              <a:ext uri="{FF2B5EF4-FFF2-40B4-BE49-F238E27FC236}">
+                <a16:creationId xmlns:a16="http://schemas.microsoft.com/office/drawing/2014/main" id="{9F202C17-CA81-9901-42FE-FFF1A8A449CD}"/>
+              </a:ext>
+            </a:extLst>
+          </p:cNvPr>
+          <p:cNvPicPr>
+            <a:picLocks noChangeAspect="1"/>
+          </p:cNvPicPr>
+          <p:nvPr/>
+        </p:nvPicPr>
+        <p:blipFill>
+          <a:blip r:embed="rId4"/>
+          <a:stretch>
+            <a:fillRect/>
+          </a:stretch>
+        </p:blipFill>
+        <p:spPr>
+          <a:xfrm>
+            <a:off x="3759093" y="3505284"/>
+            <a:ext cx="4217588" cy="2769241"/>
+          </a:xfrm>
+          <a:prstGeom prst="rect">
+            <a:avLst/>
+          </a:prstGeom>
+        </p:spPr>
+      </p:pic>
+    </p:spTree>
+    <p:extLst>
+      <p:ext uri="{BB962C8B-B14F-4D97-AF65-F5344CB8AC3E}">
+        <p14:creationId xmlns:p14="http://schemas.microsoft.com/office/powerpoint/2010/main" val="2990006344"/>
+      </p:ext>
+    </p:extLst>
+  </p:cSld>
+  <p:clrMapOvr>
+    <a:masterClrMapping/>
+  </p:clrMapOvr>
+</p:sld>
+</file>
+
+<file path=ppt/slides/slide15.xml><?xml version="1.0" encoding="utf-8"?>
+<p:sld xmlns:a="http://schemas.openxmlformats.org/drawingml/2006/main" xmlns:r="http://schemas.openxmlformats.org/officeDocument/2006/relationships" xmlns:p="http://schemas.openxmlformats.org/presentationml/2006/main" show="0">
+  <p:cSld>
+    <p:spTree>
+      <p:nvGrpSpPr>
+        <p:cNvPr id="1" name=""/>
+        <p:cNvGrpSpPr/>
+        <p:nvPr/>
+      </p:nvGrpSpPr>
+      <p:grpSpPr>
+        <a:xfrm>
+          <a:off x="0" y="0"/>
+          <a:ext cx="0" cy="0"/>
+          <a:chOff x="0" y="0"/>
+          <a:chExt cx="0" cy="0"/>
+        </a:xfrm>
+      </p:grpSpPr>
+      <p:sp>
+        <p:nvSpPr>
+          <p:cNvPr id="3" name="Content Placeholder 2">
+            <a:extLst>
+              <a:ext uri="{FF2B5EF4-FFF2-40B4-BE49-F238E27FC236}">
+                <a16:creationId xmlns:a16="http://schemas.microsoft.com/office/drawing/2014/main" id="{DA5CC814-B9B7-CAF1-D217-814886060297}"/>
+              </a:ext>
+            </a:extLst>
+          </p:cNvPr>
+          <p:cNvSpPr>
+            <a:spLocks noGrp="1"/>
+          </p:cNvSpPr>
+          <p:nvPr>
+            <p:ph idx="1"/>
+          </p:nvPr>
+        </p:nvSpPr>
+        <p:spPr>
+          <a:xfrm>
+            <a:off x="0" y="252549"/>
+            <a:ext cx="8715983" cy="5895332"/>
+          </a:xfrm>
+        </p:spPr>
+        <p:txBody>
+          <a:bodyPr/>
+          <a:lstStyle/>
+          <a:p>
+            <a:pPr marL="0" indent="0">
+              <a:buNone/>
+            </a:pPr>
+            <a:r>
+              <a:rPr lang="en-US" sz="2400" dirty="0">
+                <a:solidFill>
+                  <a:schemeClr val="accent1">
+                    <a:lumMod val="75000"/>
+                  </a:schemeClr>
+                </a:solidFill>
+              </a:rPr>
+              <a:t>2</a:t>
+            </a:r>
+            <a:r>
+              <a:rPr lang="en-US" sz="2400" dirty="0"/>
+              <a:t>.  Temperature dataset – The temperature</a:t>
+            </a:r>
+          </a:p>
+          <a:p>
+            <a:pPr marL="0" indent="0">
+              <a:buNone/>
+            </a:pPr>
+            <a:r>
+              <a:rPr lang="en-US" sz="2400" dirty="0"/>
+              <a:t>dataset consists of the electricity generated vs </a:t>
+            </a:r>
+          </a:p>
+          <a:p>
+            <a:pPr marL="0" indent="0">
+              <a:buNone/>
+            </a:pPr>
+            <a:r>
+              <a:rPr lang="en-US" sz="2400" dirty="0"/>
+              <a:t>the temperature</a:t>
+            </a:r>
+          </a:p>
+          <a:p>
+            <a:r>
+              <a:rPr lang="en-US" sz="2400" dirty="0"/>
+              <a:t>We can obtain an understanding of how the </a:t>
+            </a:r>
+          </a:p>
+          <a:p>
+            <a:pPr marL="0" indent="0">
+              <a:buNone/>
+            </a:pPr>
+            <a:r>
+              <a:rPr lang="en-US" sz="2400" dirty="0"/>
+              <a:t>rise/fall in temperature increases the</a:t>
+            </a:r>
+          </a:p>
+          <a:p>
+            <a:pPr marL="0" indent="0">
+              <a:buNone/>
+            </a:pPr>
+            <a:r>
+              <a:rPr lang="en-US" sz="2400" dirty="0"/>
+              <a:t>electricity generated/demand</a:t>
+            </a:r>
+          </a:p>
+          <a:p>
+            <a:endParaRPr lang="en-US" sz="2400" dirty="0"/>
+          </a:p>
+          <a:p>
+            <a:pPr marL="0" indent="0">
+              <a:buNone/>
+            </a:pPr>
+            <a:r>
+              <a:rPr lang="en-US" sz="2400" dirty="0">
+                <a:solidFill>
+                  <a:schemeClr val="accent1">
+                    <a:lumMod val="75000"/>
+                  </a:schemeClr>
+                </a:solidFill>
+              </a:rPr>
+              <a:t>3. </a:t>
+            </a:r>
+            <a:r>
+              <a:rPr lang="en-US" sz="2400" dirty="0"/>
+              <a:t>Gas Price – Cogeneration has been the source</a:t>
+            </a:r>
+          </a:p>
+          <a:p>
+            <a:pPr marL="0" indent="0">
+              <a:buNone/>
+            </a:pPr>
+            <a:r>
+              <a:rPr lang="en-US" sz="2400" dirty="0"/>
+              <a:t>with the highest electricity generated</a:t>
+            </a:r>
+          </a:p>
+          <a:p>
+            <a:r>
+              <a:rPr lang="en-US" sz="2400" dirty="0"/>
+              <a:t>Gas price will place an important role in predicting </a:t>
+            </a:r>
+          </a:p>
+          <a:p>
+            <a:pPr marL="0" indent="0">
+              <a:buNone/>
+            </a:pPr>
+            <a:r>
+              <a:rPr lang="en-US" sz="2400" dirty="0"/>
+              <a:t>the spot price , due to cogeneration</a:t>
+            </a:r>
+          </a:p>
+          <a:p>
+            <a:pPr marL="0" indent="0">
+              <a:buNone/>
+            </a:pPr>
+            <a:endParaRPr lang="en-US" sz="2400" dirty="0"/>
+          </a:p>
+          <a:p>
+            <a:endParaRPr lang="en-IN" sz="2400" dirty="0"/>
+          </a:p>
+        </p:txBody>
+      </p:sp>
+      <p:sp>
+        <p:nvSpPr>
+          <p:cNvPr id="4" name="Slide Number Placeholder 3">
+            <a:extLst>
+              <a:ext uri="{FF2B5EF4-FFF2-40B4-BE49-F238E27FC236}">
+                <a16:creationId xmlns:a16="http://schemas.microsoft.com/office/drawing/2014/main" id="{47C10DD6-CA8F-9455-74D0-CF686615787C}"/>
+              </a:ext>
+            </a:extLst>
+          </p:cNvPr>
+          <p:cNvSpPr>
+            <a:spLocks noGrp="1"/>
+          </p:cNvSpPr>
+          <p:nvPr>
+            <p:ph type="sldNum" sz="quarter" idx="12"/>
+          </p:nvPr>
+        </p:nvSpPr>
+        <p:spPr/>
+        <p:txBody>
+          <a:bodyPr/>
+          <a:lstStyle/>
+          <a:p>
+            <a:fld id="{5C35FCF4-C3EF-BD43-82E0-05BC237DAD2A}" type="slidenum">
+              <a:rPr lang="en-US" smtClean="0"/>
+              <a:pPr/>
+              <a:t>15</a:t>
+            </a:fld>
+            <a:endParaRPr lang="en-US" dirty="0"/>
+          </a:p>
+        </p:txBody>
+      </p:sp>
+      <p:pic>
+        <p:nvPicPr>
+          <p:cNvPr id="5" name="Picture 4">
+            <a:extLst>
+              <a:ext uri="{FF2B5EF4-FFF2-40B4-BE49-F238E27FC236}">
+                <a16:creationId xmlns:a16="http://schemas.microsoft.com/office/drawing/2014/main" id="{8AFCF6B0-0FCB-6739-E346-BB537C9407DB}"/>
+              </a:ext>
+            </a:extLst>
+          </p:cNvPr>
+          <p:cNvPicPr>
+            <a:picLocks noChangeAspect="1"/>
+          </p:cNvPicPr>
+          <p:nvPr/>
+        </p:nvPicPr>
+        <p:blipFill>
+          <a:blip r:embed="rId2"/>
+          <a:stretch>
+            <a:fillRect/>
+          </a:stretch>
+        </p:blipFill>
+        <p:spPr>
+          <a:xfrm>
+            <a:off x="6756032" y="3310753"/>
+            <a:ext cx="4106746" cy="1996393"/>
+          </a:xfrm>
+          <a:prstGeom prst="rect">
+            <a:avLst/>
+          </a:prstGeom>
+        </p:spPr>
+      </p:pic>
+      <p:pic>
+        <p:nvPicPr>
+          <p:cNvPr id="7" name="Graphic 6" descr="Dollar outline">
+            <a:extLst>
+              <a:ext uri="{FF2B5EF4-FFF2-40B4-BE49-F238E27FC236}">
+                <a16:creationId xmlns:a16="http://schemas.microsoft.com/office/drawing/2014/main" id="{59B6CF66-00AB-911F-6F8B-211212863EBC}"/>
+              </a:ext>
+            </a:extLst>
+          </p:cNvPr>
+          <p:cNvPicPr>
+            <a:picLocks noChangeAspect="1"/>
+          </p:cNvPicPr>
+          <p:nvPr/>
+        </p:nvPicPr>
+        <p:blipFill>
+          <a:blip r:embed="rId3">
+            <a:extLst>
+              <a:ext uri="{96DAC541-7B7A-43D3-8B79-37D633B846F1}">
+                <asvg:svgBlip xmlns:asvg="http://schemas.microsoft.com/office/drawing/2016/SVG/main" r:embed="rId4"/>
+              </a:ext>
+            </a:extLst>
+          </a:blip>
+          <a:stretch>
+            <a:fillRect/>
+          </a:stretch>
+        </p:blipFill>
+        <p:spPr>
+          <a:xfrm>
+            <a:off x="10706911" y="3759741"/>
+            <a:ext cx="914400" cy="914400"/>
+          </a:xfrm>
+          <a:prstGeom prst="rect">
+            <a:avLst/>
+          </a:prstGeom>
+        </p:spPr>
+      </p:pic>
+      <p:pic>
+        <p:nvPicPr>
+          <p:cNvPr id="9" name="Picture 8">
+            <a:extLst>
+              <a:ext uri="{FF2B5EF4-FFF2-40B4-BE49-F238E27FC236}">
+                <a16:creationId xmlns:a16="http://schemas.microsoft.com/office/drawing/2014/main" id="{D2F88250-620C-96D1-8862-8E98825FE62C}"/>
+              </a:ext>
+            </a:extLst>
+          </p:cNvPr>
+          <p:cNvPicPr>
+            <a:picLocks noChangeAspect="1"/>
+          </p:cNvPicPr>
+          <p:nvPr/>
+        </p:nvPicPr>
+        <p:blipFill>
+          <a:blip r:embed="rId5"/>
+          <a:stretch>
+            <a:fillRect/>
+          </a:stretch>
+        </p:blipFill>
+        <p:spPr>
+          <a:xfrm>
+            <a:off x="6745613" y="432173"/>
+            <a:ext cx="3772414" cy="2237362"/>
+          </a:xfrm>
+          <a:prstGeom prst="rect">
+            <a:avLst/>
+          </a:prstGeom>
+        </p:spPr>
+      </p:pic>
+      <p:pic>
+        <p:nvPicPr>
+          <p:cNvPr id="11" name="Graphic 10" descr="High temperature with solid fill">
+            <a:extLst>
+              <a:ext uri="{FF2B5EF4-FFF2-40B4-BE49-F238E27FC236}">
+                <a16:creationId xmlns:a16="http://schemas.microsoft.com/office/drawing/2014/main" id="{251C15EC-B87D-3C04-7BC6-7BB468F67190}"/>
+              </a:ext>
+            </a:extLst>
+          </p:cNvPr>
+          <p:cNvPicPr>
+            <a:picLocks noChangeAspect="1"/>
+          </p:cNvPicPr>
+          <p:nvPr/>
+        </p:nvPicPr>
+        <p:blipFill>
+          <a:blip r:embed="rId6">
+            <a:extLst>
+              <a:ext uri="{96DAC541-7B7A-43D3-8B79-37D633B846F1}">
+                <asvg:svgBlip xmlns:asvg="http://schemas.microsoft.com/office/drawing/2016/SVG/main" r:embed="rId7"/>
+              </a:ext>
+            </a:extLst>
+          </a:blip>
+          <a:stretch>
+            <a:fillRect/>
+          </a:stretch>
+        </p:blipFill>
+        <p:spPr>
+          <a:xfrm>
+            <a:off x="10706911" y="1378138"/>
+            <a:ext cx="914400" cy="914400"/>
+          </a:xfrm>
+          <a:prstGeom prst="rect">
+            <a:avLst/>
+          </a:prstGeom>
+        </p:spPr>
+      </p:pic>
+    </p:spTree>
+    <p:extLst>
+      <p:ext uri="{BB962C8B-B14F-4D97-AF65-F5344CB8AC3E}">
+        <p14:creationId xmlns:p14="http://schemas.microsoft.com/office/powerpoint/2010/main" val="300444134"/>
+      </p:ext>
+    </p:extLst>
+  </p:cSld>
+  <p:clrMapOvr>
+    <a:masterClrMapping/>
+  </p:clrMapOvr>
+</p:sld>
+</file>
+
+<file path=ppt/slides/slide16.xml><?xml version="1.0" encoding="utf-8"?>
+<p:sld xmlns:a="http://schemas.openxmlformats.org/drawingml/2006/main" xmlns:r="http://schemas.openxmlformats.org/officeDocument/2006/relationships" xmlns:p="http://schemas.openxmlformats.org/presentationml/2006/main" show="0">
+  <p:cSld>
+    <p:spTree>
+      <p:nvGrpSpPr>
+        <p:cNvPr id="1" name=""/>
+        <p:cNvGrpSpPr/>
+        <p:nvPr/>
+      </p:nvGrpSpPr>
+      <p:grpSpPr>
+        <a:xfrm>
+          <a:off x="0" y="0"/>
+          <a:ext cx="0" cy="0"/>
+          <a:chOff x="0" y="0"/>
+          <a:chExt cx="0" cy="0"/>
+        </a:xfrm>
+      </p:grpSpPr>
+      <p:sp>
+        <p:nvSpPr>
+          <p:cNvPr id="3" name="Content Placeholder 2">
+            <a:extLst>
+              <a:ext uri="{FF2B5EF4-FFF2-40B4-BE49-F238E27FC236}">
+                <a16:creationId xmlns:a16="http://schemas.microsoft.com/office/drawing/2014/main" id="{4A499FD7-70C6-AA1D-B99C-FA2E6159665F}"/>
+              </a:ext>
+            </a:extLst>
+          </p:cNvPr>
+          <p:cNvSpPr>
+            <a:spLocks noGrp="1"/>
+          </p:cNvSpPr>
+          <p:nvPr>
+            <p:ph idx="1"/>
+          </p:nvPr>
+        </p:nvSpPr>
+        <p:spPr>
+          <a:xfrm>
+            <a:off x="562628" y="583661"/>
+            <a:ext cx="9724372" cy="5305204"/>
+          </a:xfrm>
+        </p:spPr>
+        <p:txBody>
+          <a:bodyPr/>
+          <a:lstStyle/>
+          <a:p>
+            <a:pPr marL="0" indent="0">
+              <a:buNone/>
+            </a:pPr>
+            <a:r>
+              <a:rPr lang="en-US" dirty="0">
+                <a:solidFill>
+                  <a:schemeClr val="accent1">
+                    <a:lumMod val="75000"/>
+                  </a:schemeClr>
+                </a:solidFill>
+              </a:rPr>
+              <a:t>4</a:t>
+            </a:r>
+            <a:r>
+              <a:rPr lang="en-US" sz="2800" dirty="0">
+                <a:solidFill>
+                  <a:schemeClr val="accent1">
+                    <a:lumMod val="75000"/>
+                  </a:schemeClr>
+                </a:solidFill>
+              </a:rPr>
+              <a:t>. </a:t>
+            </a:r>
+            <a:r>
+              <a:rPr lang="en-IN" sz="2400" dirty="0"/>
+              <a:t>Generation – The generation </a:t>
+            </a:r>
+          </a:p>
+          <a:p>
+            <a:pPr marL="0" indent="0">
+              <a:buNone/>
+            </a:pPr>
+            <a:r>
+              <a:rPr lang="en-IN" sz="2400" dirty="0"/>
+              <a:t>of electricity will play a role in </a:t>
+            </a:r>
+          </a:p>
+          <a:p>
+            <a:pPr marL="0" indent="0">
+              <a:buNone/>
+            </a:pPr>
+            <a:r>
+              <a:rPr lang="en-IN" sz="2400" dirty="0"/>
+              <a:t>determining the spot price</a:t>
+            </a:r>
+          </a:p>
+          <a:p>
+            <a:pPr marL="0" indent="0">
+              <a:buNone/>
+            </a:pPr>
+            <a:endParaRPr lang="en-IN" sz="2400" dirty="0"/>
+          </a:p>
+          <a:p>
+            <a:r>
+              <a:rPr lang="en-IN" sz="2400" dirty="0"/>
+              <a:t>There is a strong correlation</a:t>
+            </a:r>
+          </a:p>
+          <a:p>
+            <a:pPr marL="0" indent="0">
+              <a:buNone/>
+            </a:pPr>
+            <a:r>
+              <a:rPr lang="en-IN" sz="2400" dirty="0"/>
+              <a:t>between the demand and the </a:t>
+            </a:r>
+          </a:p>
+          <a:p>
+            <a:pPr marL="0" indent="0">
+              <a:buNone/>
+            </a:pPr>
+            <a:r>
+              <a:rPr lang="en-IN" sz="2400" dirty="0"/>
+              <a:t>generation</a:t>
+            </a:r>
+          </a:p>
+          <a:p>
+            <a:endParaRPr lang="en-IN" sz="2400" dirty="0"/>
+          </a:p>
+          <a:p>
+            <a:r>
+              <a:rPr lang="en-IN" sz="2400" dirty="0"/>
+              <a:t>We can understand the impact</a:t>
+            </a:r>
+          </a:p>
+          <a:p>
+            <a:pPr marL="0" indent="0">
+              <a:buNone/>
+            </a:pPr>
+            <a:r>
+              <a:rPr lang="en-IN" sz="2400" dirty="0"/>
+              <a:t>of the price by visualizing the </a:t>
+            </a:r>
+          </a:p>
+          <a:p>
+            <a:pPr marL="0" indent="0">
+              <a:buNone/>
+            </a:pPr>
+            <a:r>
+              <a:rPr lang="en-IN" sz="2400" dirty="0"/>
+              <a:t>generation vs price data </a:t>
+            </a:r>
+          </a:p>
+          <a:p>
+            <a:endParaRPr lang="en-IN" dirty="0"/>
+          </a:p>
+        </p:txBody>
+      </p:sp>
+      <p:sp>
+        <p:nvSpPr>
+          <p:cNvPr id="4" name="Slide Number Placeholder 3">
+            <a:extLst>
+              <a:ext uri="{FF2B5EF4-FFF2-40B4-BE49-F238E27FC236}">
+                <a16:creationId xmlns:a16="http://schemas.microsoft.com/office/drawing/2014/main" id="{8896F38D-9919-5C8B-F9CC-78759C5056E6}"/>
+              </a:ext>
+            </a:extLst>
+          </p:cNvPr>
+          <p:cNvSpPr>
+            <a:spLocks noGrp="1"/>
+          </p:cNvSpPr>
+          <p:nvPr>
+            <p:ph type="sldNum" sz="quarter" idx="12"/>
+          </p:nvPr>
+        </p:nvSpPr>
+        <p:spPr/>
+        <p:txBody>
+          <a:bodyPr/>
+          <a:lstStyle/>
+          <a:p>
+            <a:fld id="{5C35FCF4-C3EF-BD43-82E0-05BC237DAD2A}" type="slidenum">
+              <a:rPr lang="en-US" smtClean="0"/>
+              <a:pPr/>
+              <a:t>16</a:t>
+            </a:fld>
+            <a:endParaRPr lang="en-US" dirty="0"/>
+          </a:p>
+        </p:txBody>
+      </p:sp>
+      <p:pic>
+        <p:nvPicPr>
+          <p:cNvPr id="6" name="Picture 5">
+            <a:extLst>
+              <a:ext uri="{FF2B5EF4-FFF2-40B4-BE49-F238E27FC236}">
+                <a16:creationId xmlns:a16="http://schemas.microsoft.com/office/drawing/2014/main" id="{5E1DA897-0E64-79AE-A234-36E17FD9E8D7}"/>
+              </a:ext>
+            </a:extLst>
+          </p:cNvPr>
+          <p:cNvPicPr>
+            <a:picLocks noChangeAspect="1"/>
+          </p:cNvPicPr>
+          <p:nvPr/>
+        </p:nvPicPr>
+        <p:blipFill>
+          <a:blip r:embed="rId2"/>
+          <a:stretch>
+            <a:fillRect/>
+          </a:stretch>
+        </p:blipFill>
+        <p:spPr>
+          <a:xfrm>
+            <a:off x="5496023" y="969135"/>
+            <a:ext cx="4925776" cy="2902474"/>
+          </a:xfrm>
+          <a:prstGeom prst="rect">
+            <a:avLst/>
+          </a:prstGeom>
+        </p:spPr>
+      </p:pic>
+      <p:pic>
+        <p:nvPicPr>
+          <p:cNvPr id="8" name="Graphic 7" descr="Upward trend with solid fill">
+            <a:extLst>
+              <a:ext uri="{FF2B5EF4-FFF2-40B4-BE49-F238E27FC236}">
+                <a16:creationId xmlns:a16="http://schemas.microsoft.com/office/drawing/2014/main" id="{FD19E575-71D7-1B08-1ADC-D9FE148681B8}"/>
+              </a:ext>
+            </a:extLst>
+          </p:cNvPr>
+          <p:cNvPicPr>
+            <a:picLocks noChangeAspect="1"/>
+          </p:cNvPicPr>
+          <p:nvPr/>
+        </p:nvPicPr>
+        <p:blipFill>
+          <a:blip r:embed="rId3">
+            <a:extLst>
+              <a:ext uri="{96DAC541-7B7A-43D3-8B79-37D633B846F1}">
+                <asvg:svgBlip xmlns:asvg="http://schemas.microsoft.com/office/drawing/2016/SVG/main" r:embed="rId4"/>
+              </a:ext>
+            </a:extLst>
+          </a:blip>
+          <a:stretch>
+            <a:fillRect/>
+          </a:stretch>
+        </p:blipFill>
+        <p:spPr>
+          <a:xfrm>
+            <a:off x="10556596" y="1867710"/>
+            <a:ext cx="1094362" cy="1094362"/>
+          </a:xfrm>
+          <a:prstGeom prst="rect">
+            <a:avLst/>
+          </a:prstGeom>
+        </p:spPr>
+      </p:pic>
+    </p:spTree>
+    <p:extLst>
+      <p:ext uri="{BB962C8B-B14F-4D97-AF65-F5344CB8AC3E}">
+        <p14:creationId xmlns:p14="http://schemas.microsoft.com/office/powerpoint/2010/main" val="1620598711"/>
+      </p:ext>
+    </p:extLst>
+  </p:cSld>
+  <p:clrMapOvr>
+    <a:masterClrMapping/>
+  </p:clrMapOvr>
+</p:sld>
+</file>
+
+<file path=ppt/slides/slide2.xml><?xml version="1.0" encoding="utf-8"?>
+<p:sld xmlns:a="http://schemas.openxmlformats.org/drawingml/2006/main" xmlns:r="http://schemas.openxmlformats.org/officeDocument/2006/relationships" xmlns:p="http://schemas.openxmlformats.org/presentationml/2006/main">
+  <p:cSld>
+    <p:spTree>
+      <p:nvGrpSpPr>
+        <p:cNvPr id="1" name=""/>
+        <p:cNvGrpSpPr/>
+        <p:nvPr/>
+      </p:nvGrpSpPr>
+      <p:grpSpPr>
+        <a:xfrm>
+          <a:off x="0" y="0"/>
+          <a:ext cx="0" cy="0"/>
+          <a:chOff x="0" y="0"/>
+          <a:chExt cx="0" cy="0"/>
+        </a:xfrm>
+      </p:grpSpPr>
+      <p:sp>
+        <p:nvSpPr>
+          <p:cNvPr id="2" name="Title 1">
+            <a:extLst>
+              <a:ext uri="{FF2B5EF4-FFF2-40B4-BE49-F238E27FC236}">
+                <a16:creationId xmlns:a16="http://schemas.microsoft.com/office/drawing/2014/main" id="{5EDD2AD0-B422-9948-BB03-1443DE901CD6}"/>
+              </a:ext>
+            </a:extLst>
+          </p:cNvPr>
+          <p:cNvSpPr>
+            <a:spLocks noGrp="1"/>
+          </p:cNvSpPr>
+          <p:nvPr>
+            <p:ph type="title"/>
+          </p:nvPr>
+        </p:nvSpPr>
+        <p:spPr/>
+        <p:txBody>
+          <a:bodyPr/>
+          <a:lstStyle/>
+          <a:p>
+            <a:r>
+              <a:rPr lang="en-US" dirty="0"/>
+              <a:t>Introduction</a:t>
+            </a:r>
+          </a:p>
+        </p:txBody>
+      </p:sp>
+      <p:sp>
+        <p:nvSpPr>
+          <p:cNvPr id="3" name="Content Placeholder 2">
+            <a:extLst>
+              <a:ext uri="{FF2B5EF4-FFF2-40B4-BE49-F238E27FC236}">
+                <a16:creationId xmlns:a16="http://schemas.microsoft.com/office/drawing/2014/main" id="{5480ABD6-B0BD-B94F-9DA7-56F8E322B8EC}"/>
+              </a:ext>
+            </a:extLst>
+          </p:cNvPr>
+          <p:cNvSpPr>
+            <a:spLocks noGrp="1"/>
+          </p:cNvSpPr>
+          <p:nvPr>
+            <p:ph idx="1"/>
+          </p:nvPr>
+        </p:nvSpPr>
+        <p:spPr>
+          <a:xfrm>
+            <a:off x="562628" y="1371165"/>
+            <a:ext cx="9724372" cy="4115669"/>
+          </a:xfrm>
+        </p:spPr>
+        <p:txBody>
+          <a:bodyPr/>
+          <a:lstStyle/>
+          <a:p>
+            <a:pPr>
+              <a:lnSpc>
+                <a:spcPct val="150000"/>
+              </a:lnSpc>
+              <a:spcBef>
+                <a:spcPts val="0"/>
+              </a:spcBef>
+            </a:pPr>
+            <a:r>
+              <a:rPr lang="en-US" sz="1800" b="0" i="0" dirty="0">
+                <a:effectLst/>
+                <a:latin typeface="system-ui"/>
+              </a:rPr>
+              <a:t>Alberta established a deregulated electricity market in 1996 with the Electric Utilities Act (EUA), creating the possibility for private companies to compete for customers</a:t>
+            </a:r>
+            <a:endParaRPr lang="en-US" sz="1800" dirty="0"/>
+          </a:p>
+          <a:p>
+            <a:pPr>
+              <a:lnSpc>
+                <a:spcPct val="150000"/>
+              </a:lnSpc>
+              <a:spcBef>
+                <a:spcPts val="0"/>
+              </a:spcBef>
+            </a:pPr>
+            <a:r>
+              <a:rPr lang="en-US" sz="1800" dirty="0"/>
+              <a:t>The AESO also collects and evaluates industry public data and will be the primary data source for this project</a:t>
+            </a:r>
+          </a:p>
+          <a:p>
+            <a:pPr>
+              <a:lnSpc>
+                <a:spcPct val="150000"/>
+              </a:lnSpc>
+              <a:spcBef>
+                <a:spcPts val="0"/>
+              </a:spcBef>
+            </a:pPr>
+            <a:r>
+              <a:rPr lang="en-US" sz="1800" dirty="0"/>
+              <a:t>The </a:t>
+            </a:r>
+            <a:r>
+              <a:rPr lang="en-US" sz="1800" b="1" dirty="0"/>
+              <a:t>Balancing Pool </a:t>
+            </a:r>
+            <a:r>
+              <a:rPr lang="en-US" sz="1800" dirty="0"/>
+              <a:t>administers a wholesale electricity market or ‘spot market’.</a:t>
+            </a:r>
+          </a:p>
+          <a:p>
+            <a:pPr>
+              <a:lnSpc>
+                <a:spcPct val="150000"/>
+              </a:lnSpc>
+              <a:spcBef>
+                <a:spcPts val="0"/>
+              </a:spcBef>
+            </a:pPr>
+            <a:r>
+              <a:rPr lang="en-US" sz="1800" dirty="0"/>
+              <a:t>The Power Pool matches the lowest-priced supply with demand by establishing a pool price that is revised hourly</a:t>
+            </a:r>
+          </a:p>
+        </p:txBody>
+      </p:sp>
+      <p:sp>
+        <p:nvSpPr>
+          <p:cNvPr id="4" name="Slide Number Placeholder 3">
+            <a:extLst>
+              <a:ext uri="{FF2B5EF4-FFF2-40B4-BE49-F238E27FC236}">
+                <a16:creationId xmlns:a16="http://schemas.microsoft.com/office/drawing/2014/main" id="{724FA3F3-625E-CA46-8A0A-6A0AF37CFDC8}"/>
+              </a:ext>
+            </a:extLst>
+          </p:cNvPr>
+          <p:cNvSpPr>
+            <a:spLocks noGrp="1"/>
+          </p:cNvSpPr>
+          <p:nvPr>
+            <p:ph type="sldNum" sz="quarter" idx="12"/>
+          </p:nvPr>
+        </p:nvSpPr>
+        <p:spPr/>
+        <p:txBody>
+          <a:bodyPr/>
+          <a:lstStyle/>
+          <a:p>
+            <a:fld id="{5C35FCF4-C3EF-BD43-82E0-05BC237DAD2A}" type="slidenum">
+              <a:rPr lang="en-US" smtClean="0"/>
+              <a:pPr/>
+              <a:t>2</a:t>
+            </a:fld>
+            <a:endParaRPr lang="en-US" dirty="0"/>
+          </a:p>
+        </p:txBody>
+      </p:sp>
+    </p:spTree>
+    <p:extLst>
+      <p:ext uri="{BB962C8B-B14F-4D97-AF65-F5344CB8AC3E}">
+        <p14:creationId xmlns:p14="http://schemas.microsoft.com/office/powerpoint/2010/main" val="14210611"/>
+      </p:ext>
+    </p:extLst>
+  </p:cSld>
+  <p:clrMapOvr>
+    <a:masterClrMapping/>
+  </p:clrMapOvr>
+</p:sld>
+</file>
+
+<file path=ppt/slides/slide3.xml><?xml version="1.0" encoding="utf-8"?>
+<p:sld xmlns:a="http://schemas.openxmlformats.org/drawingml/2006/main" xmlns:r="http://schemas.openxmlformats.org/officeDocument/2006/relationships" xmlns:p="http://schemas.openxmlformats.org/presentationml/2006/main">
+  <p:cSld>
+    <p:spTree>
+      <p:nvGrpSpPr>
+        <p:cNvPr id="1" name=""/>
+        <p:cNvGrpSpPr/>
+        <p:nvPr/>
+      </p:nvGrpSpPr>
+      <p:grpSpPr>
+        <a:xfrm>
+          <a:off x="0" y="0"/>
+          <a:ext cx="0" cy="0"/>
+          <a:chOff x="0" y="0"/>
+          <a:chExt cx="0" cy="0"/>
+        </a:xfrm>
+      </p:grpSpPr>
+      <p:sp>
+        <p:nvSpPr>
+          <p:cNvPr id="2" name="Title 1">
+            <a:extLst>
+              <a:ext uri="{FF2B5EF4-FFF2-40B4-BE49-F238E27FC236}">
+                <a16:creationId xmlns:a16="http://schemas.microsoft.com/office/drawing/2014/main" id="{273C65DF-767B-24D1-1E1D-14E4FF0CDECF}"/>
+              </a:ext>
+            </a:extLst>
+          </p:cNvPr>
+          <p:cNvSpPr>
+            <a:spLocks noGrp="1"/>
+          </p:cNvSpPr>
+          <p:nvPr>
+            <p:ph type="title"/>
+          </p:nvPr>
+        </p:nvSpPr>
+        <p:spPr/>
+        <p:txBody>
+          <a:bodyPr>
+            <a:normAutofit/>
+          </a:bodyPr>
+          <a:lstStyle/>
+          <a:p>
+            <a:r>
+              <a:rPr lang="en-US" dirty="0"/>
+              <a:t>Background</a:t>
+            </a:r>
+            <a:endParaRPr lang="en-IN" dirty="0"/>
+          </a:p>
+        </p:txBody>
+      </p:sp>
+      <p:sp>
+        <p:nvSpPr>
+          <p:cNvPr id="3" name="Content Placeholder 2">
+            <a:extLst>
+              <a:ext uri="{FF2B5EF4-FFF2-40B4-BE49-F238E27FC236}">
+                <a16:creationId xmlns:a16="http://schemas.microsoft.com/office/drawing/2014/main" id="{2C3485C5-5A29-46EE-605E-6B2194CEA6D7}"/>
+              </a:ext>
+            </a:extLst>
+          </p:cNvPr>
+          <p:cNvSpPr>
+            <a:spLocks noGrp="1"/>
+          </p:cNvSpPr>
+          <p:nvPr>
+            <p:ph idx="1"/>
+          </p:nvPr>
+        </p:nvSpPr>
+        <p:spPr/>
+        <p:txBody>
+          <a:bodyPr/>
+          <a:lstStyle/>
+          <a:p>
+            <a:pPr algn="just"/>
+            <a:r>
+              <a:rPr lang="en-US" sz="1800" b="0" i="0" dirty="0">
+                <a:effectLst/>
+                <a:latin typeface="system-ui"/>
+              </a:rPr>
+              <a:t>The market has multiple private providers such as ENMAX, ATCO, ENCOR and Direct Energy</a:t>
+            </a:r>
+          </a:p>
+          <a:p>
+            <a:pPr algn="just"/>
+            <a:r>
+              <a:rPr lang="en-US" sz="1800" dirty="0"/>
+              <a:t>Companies have the option of generating their power or buying short-term contracts on the spot market, or a mix of both.</a:t>
+            </a:r>
+          </a:p>
+          <a:p>
+            <a:pPr algn="just"/>
+            <a:r>
+              <a:rPr lang="en-US" sz="1800" dirty="0"/>
+              <a:t>The power supplied to the spot market is primarily generated by private or public entities.</a:t>
+            </a:r>
+          </a:p>
+        </p:txBody>
+      </p:sp>
+      <p:sp>
+        <p:nvSpPr>
+          <p:cNvPr id="4" name="Slide Number Placeholder 3">
+            <a:extLst>
+              <a:ext uri="{FF2B5EF4-FFF2-40B4-BE49-F238E27FC236}">
+                <a16:creationId xmlns:a16="http://schemas.microsoft.com/office/drawing/2014/main" id="{6B9C625D-9F02-E6D9-A336-9651482EBB60}"/>
+              </a:ext>
+            </a:extLst>
+          </p:cNvPr>
+          <p:cNvSpPr>
+            <a:spLocks noGrp="1"/>
+          </p:cNvSpPr>
+          <p:nvPr>
+            <p:ph type="sldNum" sz="quarter" idx="12"/>
+          </p:nvPr>
+        </p:nvSpPr>
+        <p:spPr/>
+        <p:txBody>
+          <a:bodyPr/>
+          <a:lstStyle/>
+          <a:p>
+            <a:fld id="{5C35FCF4-C3EF-BD43-82E0-05BC237DAD2A}" type="slidenum">
+              <a:rPr lang="en-US" smtClean="0"/>
+              <a:pPr/>
+              <a:t>3</a:t>
+            </a:fld>
+            <a:endParaRPr lang="en-US" dirty="0"/>
+          </a:p>
+        </p:txBody>
+      </p:sp>
+    </p:spTree>
+    <p:extLst>
+      <p:ext uri="{BB962C8B-B14F-4D97-AF65-F5344CB8AC3E}">
+        <p14:creationId xmlns:p14="http://schemas.microsoft.com/office/powerpoint/2010/main" val="443483967"/>
+      </p:ext>
+    </p:extLst>
+  </p:cSld>
+  <p:clrMapOvr>
+    <a:masterClrMapping/>
+  </p:clrMapOvr>
+</p:sld>
+</file>
+
+<file path=ppt/slides/slide4.xml><?xml version="1.0" encoding="utf-8"?>
+<p:sld xmlns:a="http://schemas.openxmlformats.org/drawingml/2006/main" xmlns:r="http://schemas.openxmlformats.org/officeDocument/2006/relationships" xmlns:p="http://schemas.openxmlformats.org/presentationml/2006/main">
+  <p:cSld>
+    <p:spTree>
+      <p:nvGrpSpPr>
+        <p:cNvPr id="1" name=""/>
+        <p:cNvGrpSpPr/>
+        <p:nvPr/>
+      </p:nvGrpSpPr>
+      <p:grpSpPr>
+        <a:xfrm>
+          <a:off x="0" y="0"/>
+          <a:ext cx="0" cy="0"/>
+          <a:chOff x="0" y="0"/>
+          <a:chExt cx="0" cy="0"/>
+        </a:xfrm>
+      </p:grpSpPr>
+      <p:sp>
+        <p:nvSpPr>
+          <p:cNvPr id="2" name="Title 1">
+            <a:extLst>
+              <a:ext uri="{FF2B5EF4-FFF2-40B4-BE49-F238E27FC236}">
+                <a16:creationId xmlns:a16="http://schemas.microsoft.com/office/drawing/2014/main" id="{E2B0AB8E-7B40-9F18-0EC7-4E1126527C3B}"/>
+              </a:ext>
+            </a:extLst>
+          </p:cNvPr>
+          <p:cNvSpPr>
+            <a:spLocks noGrp="1"/>
+          </p:cNvSpPr>
+          <p:nvPr>
+            <p:ph type="title"/>
+          </p:nvPr>
+        </p:nvSpPr>
+        <p:spPr/>
+        <p:txBody>
+          <a:bodyPr/>
+          <a:lstStyle/>
+          <a:p>
+            <a:r>
+              <a:rPr lang="en-US" dirty="0"/>
+              <a:t>Objective		</a:t>
+            </a:r>
+            <a:endParaRPr lang="en-IN" dirty="0"/>
+          </a:p>
+        </p:txBody>
+      </p:sp>
+      <p:sp>
+        <p:nvSpPr>
+          <p:cNvPr id="3" name="Content Placeholder 2">
+            <a:extLst>
+              <a:ext uri="{FF2B5EF4-FFF2-40B4-BE49-F238E27FC236}">
+                <a16:creationId xmlns:a16="http://schemas.microsoft.com/office/drawing/2014/main" id="{59AC0C05-3BC4-DD84-FAA2-902007B1AAF0}"/>
+              </a:ext>
+            </a:extLst>
+          </p:cNvPr>
+          <p:cNvSpPr>
+            <a:spLocks noGrp="1"/>
+          </p:cNvSpPr>
+          <p:nvPr>
+            <p:ph idx="1"/>
+          </p:nvPr>
+        </p:nvSpPr>
+        <p:spPr>
+          <a:xfrm>
+            <a:off x="562628" y="1871037"/>
+            <a:ext cx="9724372" cy="2804160"/>
+          </a:xfrm>
+        </p:spPr>
+        <p:txBody>
+          <a:bodyPr/>
+          <a:lstStyle/>
+          <a:p>
+            <a:pPr algn="just"/>
+            <a:r>
+              <a:rPr lang="en-IN" sz="2000" dirty="0"/>
+              <a:t>Study the relationship between a group of variables and spot prices based on different factors such as </a:t>
+            </a:r>
+            <a:r>
+              <a:rPr lang="en-US" sz="2000" dirty="0"/>
+              <a:t>weather, population growth, type of generation and demand.</a:t>
+            </a:r>
+          </a:p>
+          <a:p>
+            <a:pPr algn="just"/>
+            <a:r>
+              <a:rPr lang="en-IN" sz="2000" dirty="0"/>
+              <a:t>Develop a time-series model that can predict with certain confidence the spot price for next hours.</a:t>
+            </a:r>
+          </a:p>
+          <a:p>
+            <a:pPr algn="just"/>
+            <a:r>
+              <a:rPr lang="en-IN" sz="2000" dirty="0"/>
+              <a:t>Understand the different energy sources and the amount of electricity generated from each of these sources</a:t>
+            </a:r>
+          </a:p>
+        </p:txBody>
+      </p:sp>
+      <p:sp>
+        <p:nvSpPr>
+          <p:cNvPr id="4" name="Slide Number Placeholder 3">
+            <a:extLst>
+              <a:ext uri="{FF2B5EF4-FFF2-40B4-BE49-F238E27FC236}">
+                <a16:creationId xmlns:a16="http://schemas.microsoft.com/office/drawing/2014/main" id="{FC35C989-193C-3FDB-0D2E-F1FCBE3DFF66}"/>
+              </a:ext>
+            </a:extLst>
+          </p:cNvPr>
+          <p:cNvSpPr>
+            <a:spLocks noGrp="1"/>
+          </p:cNvSpPr>
+          <p:nvPr>
+            <p:ph type="sldNum" sz="quarter" idx="12"/>
+          </p:nvPr>
+        </p:nvSpPr>
+        <p:spPr/>
+        <p:txBody>
+          <a:bodyPr/>
+          <a:lstStyle/>
+          <a:p>
+            <a:fld id="{5C35FCF4-C3EF-BD43-82E0-05BC237DAD2A}" type="slidenum">
+              <a:rPr lang="en-US" smtClean="0"/>
+              <a:pPr/>
+              <a:t>4</a:t>
+            </a:fld>
+            <a:endParaRPr lang="en-US" dirty="0"/>
+          </a:p>
+        </p:txBody>
+      </p:sp>
+    </p:spTree>
+    <p:extLst>
+      <p:ext uri="{BB962C8B-B14F-4D97-AF65-F5344CB8AC3E}">
+        <p14:creationId xmlns:p14="http://schemas.microsoft.com/office/powerpoint/2010/main" val="3913368451"/>
+      </p:ext>
+    </p:extLst>
+  </p:cSld>
+  <p:clrMapOvr>
+    <a:masterClrMapping/>
+  </p:clrMapOvr>
+</p:sld>
+</file>
+
+<file path=ppt/slides/slide5.xml><?xml version="1.0" encoding="utf-8"?>
+<p:sld xmlns:a="http://schemas.openxmlformats.org/drawingml/2006/main" xmlns:r="http://schemas.openxmlformats.org/officeDocument/2006/relationships" xmlns:p="http://schemas.openxmlformats.org/presentationml/2006/main">
+  <p:cSld>
+    <p:spTree>
+      <p:nvGrpSpPr>
+        <p:cNvPr id="1" name=""/>
+        <p:cNvGrpSpPr/>
+        <p:nvPr/>
+      </p:nvGrpSpPr>
+      <p:grpSpPr>
+        <a:xfrm>
+          <a:off x="0" y="0"/>
+          <a:ext cx="0" cy="0"/>
+          <a:chOff x="0" y="0"/>
+          <a:chExt cx="0" cy="0"/>
+        </a:xfrm>
+      </p:grpSpPr>
+      <p:sp>
+        <p:nvSpPr>
+          <p:cNvPr id="2" name="Title 1">
+            <a:extLst>
+              <a:ext uri="{FF2B5EF4-FFF2-40B4-BE49-F238E27FC236}">
+                <a16:creationId xmlns:a16="http://schemas.microsoft.com/office/drawing/2014/main" id="{2086750A-DAA9-5989-0F16-EF0A1E7D314E}"/>
+              </a:ext>
+            </a:extLst>
+          </p:cNvPr>
+          <p:cNvSpPr>
+            <a:spLocks noGrp="1"/>
+          </p:cNvSpPr>
+          <p:nvPr>
+            <p:ph type="title"/>
+          </p:nvPr>
+        </p:nvSpPr>
+        <p:spPr/>
+        <p:txBody>
+          <a:bodyPr/>
+          <a:lstStyle/>
+          <a:p>
+            <a:r>
+              <a:rPr lang="en-US" dirty="0"/>
+              <a:t>Insights gained from each dataset	</a:t>
+            </a:r>
+            <a:endParaRPr lang="en-IN" dirty="0"/>
+          </a:p>
+        </p:txBody>
+      </p:sp>
+      <p:sp>
+        <p:nvSpPr>
+          <p:cNvPr id="3" name="Content Placeholder 2">
+            <a:extLst>
+              <a:ext uri="{FF2B5EF4-FFF2-40B4-BE49-F238E27FC236}">
+                <a16:creationId xmlns:a16="http://schemas.microsoft.com/office/drawing/2014/main" id="{C50EB759-C44B-42FC-9EEE-77CADB8D8033}"/>
+              </a:ext>
+            </a:extLst>
+          </p:cNvPr>
+          <p:cNvSpPr>
+            <a:spLocks noGrp="1"/>
+          </p:cNvSpPr>
+          <p:nvPr>
+            <p:ph idx="1"/>
+          </p:nvPr>
+        </p:nvSpPr>
+        <p:spPr>
+          <a:xfrm>
+            <a:off x="562628" y="2140085"/>
+            <a:ext cx="10977100" cy="3748779"/>
+          </a:xfrm>
+        </p:spPr>
+        <p:txBody>
+          <a:bodyPr/>
+          <a:lstStyle/>
+          <a:p>
+            <a:pPr algn="just"/>
+            <a:r>
+              <a:rPr lang="en-US" sz="1800" b="1" dirty="0"/>
+              <a:t>Temperature data:</a:t>
+            </a:r>
+            <a:r>
+              <a:rPr lang="en-US" sz="1800" dirty="0"/>
+              <a:t> this dataset when joined with the generation data gives us some insights on what the generation value is based on the temperature</a:t>
+            </a:r>
+          </a:p>
+          <a:p>
+            <a:pPr algn="just"/>
+            <a:r>
+              <a:rPr lang="en-IN" sz="1800" dirty="0"/>
+              <a:t>We can combine 2 datasets using an </a:t>
+            </a:r>
+            <a:r>
+              <a:rPr lang="en-IN" sz="1800" b="1" i="1" dirty="0"/>
+              <a:t>inner join </a:t>
+            </a:r>
+            <a:r>
+              <a:rPr lang="en-IN" sz="1800" dirty="0"/>
+              <a:t>based on the date/hour column</a:t>
+            </a:r>
+          </a:p>
+          <a:p>
+            <a:pPr algn="just"/>
+            <a:r>
+              <a:rPr lang="en-IN" sz="1800" dirty="0"/>
+              <a:t>Ordering the results by temperature, we can see which days have the highest electricity generated compared to the lowest temperatures</a:t>
+            </a:r>
+          </a:p>
+          <a:p>
+            <a:pPr algn="just"/>
+            <a:r>
+              <a:rPr lang="en-IN" sz="1800" dirty="0"/>
+              <a:t>We are expected to see a rise in electricity generated when the temperatures increase, as air-conditioners and humidifiers are turned on.</a:t>
+            </a:r>
+          </a:p>
+        </p:txBody>
+      </p:sp>
+      <p:sp>
+        <p:nvSpPr>
+          <p:cNvPr id="4" name="Slide Number Placeholder 3">
+            <a:extLst>
+              <a:ext uri="{FF2B5EF4-FFF2-40B4-BE49-F238E27FC236}">
+                <a16:creationId xmlns:a16="http://schemas.microsoft.com/office/drawing/2014/main" id="{32E76D7A-D9D0-544A-F7AE-BBD35D106EFA}"/>
+              </a:ext>
+            </a:extLst>
+          </p:cNvPr>
+          <p:cNvSpPr>
+            <a:spLocks noGrp="1"/>
+          </p:cNvSpPr>
+          <p:nvPr>
+            <p:ph type="sldNum" sz="quarter" idx="12"/>
+          </p:nvPr>
+        </p:nvSpPr>
+        <p:spPr/>
+        <p:txBody>
+          <a:bodyPr/>
+          <a:lstStyle/>
+          <a:p>
+            <a:fld id="{5C35FCF4-C3EF-BD43-82E0-05BC237DAD2A}" type="slidenum">
+              <a:rPr lang="en-US" smtClean="0"/>
+              <a:pPr/>
+              <a:t>5</a:t>
+            </a:fld>
+            <a:endParaRPr lang="en-US" dirty="0"/>
+          </a:p>
+        </p:txBody>
+      </p:sp>
+    </p:spTree>
+    <p:extLst>
+      <p:ext uri="{BB962C8B-B14F-4D97-AF65-F5344CB8AC3E}">
+        <p14:creationId xmlns:p14="http://schemas.microsoft.com/office/powerpoint/2010/main" val="3008990893"/>
+      </p:ext>
+    </p:extLst>
+  </p:cSld>
+  <p:clrMapOvr>
+    <a:masterClrMapping/>
+  </p:clrMapOvr>
+</p:sld>
+</file>
+
+<file path=ppt/slides/slide6.xml><?xml version="1.0" encoding="utf-8"?>
+<p:sld xmlns:a="http://schemas.openxmlformats.org/drawingml/2006/main" xmlns:r="http://schemas.openxmlformats.org/officeDocument/2006/relationships" xmlns:p="http://schemas.openxmlformats.org/presentationml/2006/main">
+  <p:cSld>
+    <p:spTree>
+      <p:nvGrpSpPr>
+        <p:cNvPr id="1" name=""/>
+        <p:cNvGrpSpPr/>
+        <p:nvPr/>
+      </p:nvGrpSpPr>
+      <p:grpSpPr>
+        <a:xfrm>
+          <a:off x="0" y="0"/>
+          <a:ext cx="0" cy="0"/>
+          <a:chOff x="0" y="0"/>
+          <a:chExt cx="0" cy="0"/>
+        </a:xfrm>
+      </p:grpSpPr>
+      <p:sp>
+        <p:nvSpPr>
+          <p:cNvPr id="3" name="Content Placeholder 2">
+            <a:extLst>
+              <a:ext uri="{FF2B5EF4-FFF2-40B4-BE49-F238E27FC236}">
+                <a16:creationId xmlns:a16="http://schemas.microsoft.com/office/drawing/2014/main" id="{D36ED97D-0292-F4F4-E3BC-94BFD57979DF}"/>
+              </a:ext>
+            </a:extLst>
+          </p:cNvPr>
+          <p:cNvSpPr>
+            <a:spLocks noGrp="1"/>
+          </p:cNvSpPr>
+          <p:nvPr>
+            <p:ph idx="1"/>
+          </p:nvPr>
+        </p:nvSpPr>
+        <p:spPr>
+          <a:xfrm>
+            <a:off x="7436887" y="2131137"/>
+            <a:ext cx="4663477" cy="5421936"/>
+          </a:xfrm>
+        </p:spPr>
+        <p:txBody>
+          <a:bodyPr/>
+          <a:lstStyle/>
+          <a:p>
+            <a:pPr algn="just"/>
+            <a:r>
+              <a:rPr lang="en-US" sz="1800" dirty="0"/>
+              <a:t>This indicates that the relationship </a:t>
+            </a:r>
+            <a:r>
+              <a:rPr lang="en-US" sz="1800" b="1" dirty="0"/>
+              <a:t>is not linear </a:t>
+            </a:r>
+          </a:p>
+          <a:p>
+            <a:pPr algn="just"/>
+            <a:r>
+              <a:rPr lang="en-IN" sz="1800" dirty="0"/>
+              <a:t>If we were to build a regression model, we would need to look at non-linear models or exclude the temperature variable due to non-linearity</a:t>
+            </a:r>
+          </a:p>
+          <a:p>
+            <a:pPr algn="just"/>
+            <a:endParaRPr lang="en-US" sz="1800" dirty="0"/>
+          </a:p>
+        </p:txBody>
+      </p:sp>
+      <p:sp>
+        <p:nvSpPr>
+          <p:cNvPr id="4" name="Slide Number Placeholder 3">
+            <a:extLst>
+              <a:ext uri="{FF2B5EF4-FFF2-40B4-BE49-F238E27FC236}">
+                <a16:creationId xmlns:a16="http://schemas.microsoft.com/office/drawing/2014/main" id="{26A05CBE-BD42-D6AA-7874-9420A4C766AC}"/>
+              </a:ext>
+            </a:extLst>
+          </p:cNvPr>
+          <p:cNvSpPr>
+            <a:spLocks noGrp="1"/>
+          </p:cNvSpPr>
+          <p:nvPr>
+            <p:ph type="sldNum" sz="quarter" idx="12"/>
+          </p:nvPr>
+        </p:nvSpPr>
+        <p:spPr/>
+        <p:txBody>
+          <a:bodyPr/>
+          <a:lstStyle/>
+          <a:p>
+            <a:fld id="{5C35FCF4-C3EF-BD43-82E0-05BC237DAD2A}" type="slidenum">
+              <a:rPr lang="en-US" smtClean="0"/>
+              <a:pPr/>
+              <a:t>6</a:t>
+            </a:fld>
+            <a:endParaRPr lang="en-US" dirty="0"/>
+          </a:p>
+        </p:txBody>
+      </p:sp>
+      <p:sp>
+        <p:nvSpPr>
+          <p:cNvPr id="2" name="Title 1">
+            <a:extLst>
+              <a:ext uri="{FF2B5EF4-FFF2-40B4-BE49-F238E27FC236}">
+                <a16:creationId xmlns:a16="http://schemas.microsoft.com/office/drawing/2014/main" id="{35989FBF-1934-0B57-EF44-BB45263C2645}"/>
+              </a:ext>
+            </a:extLst>
+          </p:cNvPr>
+          <p:cNvSpPr>
+            <a:spLocks noGrp="1"/>
+          </p:cNvSpPr>
+          <p:nvPr>
+            <p:ph type="title"/>
+          </p:nvPr>
+        </p:nvSpPr>
+        <p:spPr>
+          <a:xfrm>
+            <a:off x="562628" y="463968"/>
+            <a:ext cx="9724372" cy="1033398"/>
+          </a:xfrm>
+        </p:spPr>
+        <p:txBody>
+          <a:bodyPr/>
+          <a:lstStyle/>
+          <a:p>
+            <a:r>
+              <a:rPr lang="en-US" dirty="0"/>
+              <a:t>Temperature vs Generation (MWh)</a:t>
+            </a:r>
+            <a:endParaRPr lang="en-IN" dirty="0"/>
+          </a:p>
+        </p:txBody>
+      </p:sp>
+      <p:pic>
+        <p:nvPicPr>
+          <p:cNvPr id="7" name="Picture 6">
+            <a:extLst>
+              <a:ext uri="{FF2B5EF4-FFF2-40B4-BE49-F238E27FC236}">
+                <a16:creationId xmlns:a16="http://schemas.microsoft.com/office/drawing/2014/main" id="{E9A4D5CE-6640-9F2E-7605-E4ADE5D5967F}"/>
+              </a:ext>
+            </a:extLst>
+          </p:cNvPr>
+          <p:cNvPicPr>
+            <a:picLocks noChangeAspect="1"/>
+          </p:cNvPicPr>
+          <p:nvPr/>
+        </p:nvPicPr>
+        <p:blipFill>
+          <a:blip r:embed="rId2"/>
+          <a:stretch>
+            <a:fillRect/>
+          </a:stretch>
+        </p:blipFill>
+        <p:spPr>
+          <a:xfrm>
+            <a:off x="0" y="1799617"/>
+            <a:ext cx="7334504" cy="3766566"/>
+          </a:xfrm>
+          <a:prstGeom prst="rect">
+            <a:avLst/>
+          </a:prstGeom>
+        </p:spPr>
+      </p:pic>
+    </p:spTree>
+    <p:extLst>
+      <p:ext uri="{BB962C8B-B14F-4D97-AF65-F5344CB8AC3E}">
+        <p14:creationId xmlns:p14="http://schemas.microsoft.com/office/powerpoint/2010/main" val="2670562210"/>
+      </p:ext>
+    </p:extLst>
+  </p:cSld>
+  <p:clrMapOvr>
+    <a:masterClrMapping/>
+  </p:clrMapOvr>
+</p:sld>
+</file>
+
+<file path=ppt/slides/slide7.xml><?xml version="1.0" encoding="utf-8"?>
+<p:sld xmlns:a="http://schemas.openxmlformats.org/drawingml/2006/main" xmlns:r="http://schemas.openxmlformats.org/officeDocument/2006/relationships" xmlns:p="http://schemas.openxmlformats.org/presentationml/2006/main">
+  <p:cSld>
+    <p:spTree>
+      <p:nvGrpSpPr>
+        <p:cNvPr id="1" name=""/>
+        <p:cNvGrpSpPr/>
+        <p:nvPr/>
+      </p:nvGrpSpPr>
+      <p:grpSpPr>
+        <a:xfrm>
+          <a:off x="0" y="0"/>
+          <a:ext cx="0" cy="0"/>
+          <a:chOff x="0" y="0"/>
+          <a:chExt cx="0" cy="0"/>
+        </a:xfrm>
+      </p:grpSpPr>
+      <p:sp>
+        <p:nvSpPr>
+          <p:cNvPr id="2" name="Title 1">
+            <a:extLst>
+              <a:ext uri="{FF2B5EF4-FFF2-40B4-BE49-F238E27FC236}">
+                <a16:creationId xmlns:a16="http://schemas.microsoft.com/office/drawing/2014/main" id="{0E6A89D0-CCAF-3AC6-9CAE-4B4291FDE7F1}"/>
+              </a:ext>
+            </a:extLst>
+          </p:cNvPr>
+          <p:cNvSpPr>
+            <a:spLocks noGrp="1"/>
+          </p:cNvSpPr>
+          <p:nvPr>
+            <p:ph type="title"/>
+          </p:nvPr>
+        </p:nvSpPr>
+        <p:spPr/>
+        <p:txBody>
+          <a:bodyPr>
+            <a:normAutofit fontScale="90000"/>
+          </a:bodyPr>
+          <a:lstStyle/>
+          <a:p>
+            <a:r>
+              <a:rPr lang="en-US" dirty="0"/>
+              <a:t>Energy generation for Alberta’s Coldest and Warmest months</a:t>
+            </a:r>
+            <a:endParaRPr lang="en-IN" dirty="0"/>
+          </a:p>
+        </p:txBody>
+      </p:sp>
+      <p:sp>
+        <p:nvSpPr>
+          <p:cNvPr id="3" name="Content Placeholder 2">
+            <a:extLst>
+              <a:ext uri="{FF2B5EF4-FFF2-40B4-BE49-F238E27FC236}">
+                <a16:creationId xmlns:a16="http://schemas.microsoft.com/office/drawing/2014/main" id="{36B4140C-EDCF-1343-0E39-BE1B5A04CDCF}"/>
+              </a:ext>
+            </a:extLst>
+          </p:cNvPr>
+          <p:cNvSpPr>
+            <a:spLocks noGrp="1"/>
+          </p:cNvSpPr>
+          <p:nvPr>
+            <p:ph idx="1"/>
+          </p:nvPr>
+        </p:nvSpPr>
+        <p:spPr>
+          <a:xfrm>
+            <a:off x="562629" y="2149813"/>
+            <a:ext cx="6003542" cy="3739051"/>
+          </a:xfrm>
+        </p:spPr>
+        <p:txBody>
+          <a:bodyPr/>
+          <a:lstStyle/>
+          <a:p>
+            <a:r>
+              <a:rPr lang="en-US" sz="1600" dirty="0"/>
+              <a:t>Filtering out the rows to include the coldest month that is, September to February </a:t>
+            </a:r>
+          </a:p>
+          <a:p>
+            <a:r>
+              <a:rPr lang="en-US" sz="1600" dirty="0"/>
+              <a:t>We compare the temperature and electricity generated for these </a:t>
+            </a:r>
+            <a:r>
+              <a:rPr lang="en-US" sz="1600" b="1" dirty="0"/>
+              <a:t>coldest months</a:t>
+            </a:r>
+            <a:endParaRPr lang="en-IN" sz="1600" b="1" dirty="0"/>
+          </a:p>
+        </p:txBody>
+      </p:sp>
+      <p:sp>
+        <p:nvSpPr>
+          <p:cNvPr id="4" name="Slide Number Placeholder 3">
+            <a:extLst>
+              <a:ext uri="{FF2B5EF4-FFF2-40B4-BE49-F238E27FC236}">
+                <a16:creationId xmlns:a16="http://schemas.microsoft.com/office/drawing/2014/main" id="{026DB215-9D70-835E-9997-68320FB1B5D8}"/>
+              </a:ext>
+            </a:extLst>
+          </p:cNvPr>
+          <p:cNvSpPr>
+            <a:spLocks noGrp="1"/>
+          </p:cNvSpPr>
+          <p:nvPr>
+            <p:ph type="sldNum" sz="quarter" idx="12"/>
+          </p:nvPr>
+        </p:nvSpPr>
+        <p:spPr/>
+        <p:txBody>
+          <a:bodyPr/>
+          <a:lstStyle/>
+          <a:p>
+            <a:fld id="{5C35FCF4-C3EF-BD43-82E0-05BC237DAD2A}" type="slidenum">
+              <a:rPr lang="en-US" smtClean="0"/>
+              <a:pPr/>
+              <a:t>7</a:t>
+            </a:fld>
+            <a:endParaRPr lang="en-US" dirty="0"/>
+          </a:p>
+        </p:txBody>
+      </p:sp>
+      <p:pic>
+        <p:nvPicPr>
+          <p:cNvPr id="10" name="Picture 9">
+            <a:extLst>
+              <a:ext uri="{FF2B5EF4-FFF2-40B4-BE49-F238E27FC236}">
+                <a16:creationId xmlns:a16="http://schemas.microsoft.com/office/drawing/2014/main" id="{63B84E74-17D5-1800-4DB5-E42B352E1BF1}"/>
+              </a:ext>
+            </a:extLst>
+          </p:cNvPr>
+          <p:cNvPicPr>
+            <a:picLocks noChangeAspect="1"/>
+          </p:cNvPicPr>
+          <p:nvPr/>
+        </p:nvPicPr>
+        <p:blipFill>
+          <a:blip r:embed="rId2"/>
+          <a:stretch>
+            <a:fillRect/>
+          </a:stretch>
+        </p:blipFill>
+        <p:spPr>
+          <a:xfrm>
+            <a:off x="0" y="3429000"/>
+            <a:ext cx="5398193" cy="2589260"/>
+          </a:xfrm>
+          <a:prstGeom prst="rect">
+            <a:avLst/>
+          </a:prstGeom>
+        </p:spPr>
+      </p:pic>
+      <p:pic>
+        <p:nvPicPr>
+          <p:cNvPr id="14" name="Picture 13">
+            <a:extLst>
+              <a:ext uri="{FF2B5EF4-FFF2-40B4-BE49-F238E27FC236}">
+                <a16:creationId xmlns:a16="http://schemas.microsoft.com/office/drawing/2014/main" id="{7613496D-0716-B2A4-F04E-72F14CF3E230}"/>
+              </a:ext>
+            </a:extLst>
+          </p:cNvPr>
+          <p:cNvPicPr>
+            <a:picLocks noChangeAspect="1"/>
+          </p:cNvPicPr>
+          <p:nvPr/>
+        </p:nvPicPr>
+        <p:blipFill>
+          <a:blip r:embed="rId3"/>
+          <a:stretch>
+            <a:fillRect/>
+          </a:stretch>
+        </p:blipFill>
+        <p:spPr>
+          <a:xfrm>
+            <a:off x="5515584" y="3236572"/>
+            <a:ext cx="5202847" cy="2781688"/>
+          </a:xfrm>
+          <a:prstGeom prst="rect">
+            <a:avLst/>
+          </a:prstGeom>
+        </p:spPr>
+      </p:pic>
+    </p:spTree>
+    <p:extLst>
+      <p:ext uri="{BB962C8B-B14F-4D97-AF65-F5344CB8AC3E}">
+        <p14:creationId xmlns:p14="http://schemas.microsoft.com/office/powerpoint/2010/main" val="3698844861"/>
+      </p:ext>
+    </p:extLst>
+  </p:cSld>
+  <p:clrMapOvr>
+    <a:masterClrMapping/>
+  </p:clrMapOvr>
+</p:sld>
+</file>
+
+<file path=ppt/slides/slide8.xml><?xml version="1.0" encoding="utf-8"?>
+<p:sld xmlns:a="http://schemas.openxmlformats.org/drawingml/2006/main" xmlns:r="http://schemas.openxmlformats.org/officeDocument/2006/relationships" xmlns:p="http://schemas.openxmlformats.org/presentationml/2006/main">
+  <p:cSld>
+    <p:spTree>
+      <p:nvGrpSpPr>
+        <p:cNvPr id="1" name=""/>
+        <p:cNvGrpSpPr/>
+        <p:nvPr/>
+      </p:nvGrpSpPr>
+      <p:grpSpPr>
+        <a:xfrm>
+          <a:off x="0" y="0"/>
+          <a:ext cx="0" cy="0"/>
+          <a:chOff x="0" y="0"/>
+          <a:chExt cx="0" cy="0"/>
+        </a:xfrm>
+      </p:grpSpPr>
+      <p:sp>
+        <p:nvSpPr>
+          <p:cNvPr id="3" name="Content Placeholder 2">
+            <a:extLst>
+              <a:ext uri="{FF2B5EF4-FFF2-40B4-BE49-F238E27FC236}">
+                <a16:creationId xmlns:a16="http://schemas.microsoft.com/office/drawing/2014/main" id="{C1FF88E1-CB52-DC51-5790-CC2523E6F725}"/>
+              </a:ext>
+            </a:extLst>
+          </p:cNvPr>
+          <p:cNvSpPr>
+            <a:spLocks noGrp="1"/>
+          </p:cNvSpPr>
+          <p:nvPr>
+            <p:ph idx="1"/>
+          </p:nvPr>
+        </p:nvSpPr>
+        <p:spPr>
+          <a:xfrm>
+            <a:off x="562629" y="1196503"/>
+            <a:ext cx="6519108" cy="4692362"/>
+          </a:xfrm>
+        </p:spPr>
+        <p:txBody>
+          <a:bodyPr/>
+          <a:lstStyle/>
+          <a:p>
+            <a:r>
+              <a:rPr lang="en-US" sz="1600" dirty="0"/>
+              <a:t>Filtering out the rows to include the warmest month that is, April to July </a:t>
+            </a:r>
+          </a:p>
+          <a:p>
+            <a:r>
+              <a:rPr lang="en-US" sz="1600" dirty="0"/>
+              <a:t>We compare the temperature and electricity generated for these </a:t>
+            </a:r>
+            <a:r>
+              <a:rPr lang="en-US" sz="1600" b="1" dirty="0"/>
+              <a:t>warmest months</a:t>
+            </a:r>
+            <a:endParaRPr lang="en-IN" sz="1600" b="1" dirty="0"/>
+          </a:p>
+          <a:p>
+            <a:endParaRPr lang="en-IN" dirty="0"/>
+          </a:p>
+        </p:txBody>
+      </p:sp>
+      <p:sp>
+        <p:nvSpPr>
+          <p:cNvPr id="4" name="Slide Number Placeholder 3">
+            <a:extLst>
+              <a:ext uri="{FF2B5EF4-FFF2-40B4-BE49-F238E27FC236}">
+                <a16:creationId xmlns:a16="http://schemas.microsoft.com/office/drawing/2014/main" id="{49FE3083-5248-A52E-B7F4-F91BB4180DB4}"/>
+              </a:ext>
+            </a:extLst>
+          </p:cNvPr>
+          <p:cNvSpPr>
+            <a:spLocks noGrp="1"/>
+          </p:cNvSpPr>
+          <p:nvPr>
+            <p:ph type="sldNum" sz="quarter" idx="12"/>
+          </p:nvPr>
+        </p:nvSpPr>
+        <p:spPr/>
+        <p:txBody>
+          <a:bodyPr/>
+          <a:lstStyle/>
+          <a:p>
+            <a:fld id="{5C35FCF4-C3EF-BD43-82E0-05BC237DAD2A}" type="slidenum">
+              <a:rPr lang="en-US" smtClean="0"/>
+              <a:pPr/>
+              <a:t>8</a:t>
+            </a:fld>
+            <a:endParaRPr lang="en-US" dirty="0"/>
+          </a:p>
+        </p:txBody>
+      </p:sp>
+      <p:pic>
+        <p:nvPicPr>
+          <p:cNvPr id="6" name="Picture 5">
+            <a:extLst>
+              <a:ext uri="{FF2B5EF4-FFF2-40B4-BE49-F238E27FC236}">
+                <a16:creationId xmlns:a16="http://schemas.microsoft.com/office/drawing/2014/main" id="{FD9B2CE3-9BE5-5798-4A55-0B03405A4163}"/>
+              </a:ext>
+            </a:extLst>
+          </p:cNvPr>
+          <p:cNvPicPr>
+            <a:picLocks noChangeAspect="1"/>
+          </p:cNvPicPr>
+          <p:nvPr/>
+        </p:nvPicPr>
+        <p:blipFill>
+          <a:blip r:embed="rId2"/>
+          <a:stretch>
+            <a:fillRect/>
+          </a:stretch>
+        </p:blipFill>
+        <p:spPr>
+          <a:xfrm>
+            <a:off x="0" y="3245953"/>
+            <a:ext cx="5563376" cy="2905530"/>
+          </a:xfrm>
+          <a:prstGeom prst="rect">
+            <a:avLst/>
+          </a:prstGeom>
+        </p:spPr>
+      </p:pic>
+      <p:pic>
+        <p:nvPicPr>
+          <p:cNvPr id="8" name="Picture 7">
+            <a:extLst>
+              <a:ext uri="{FF2B5EF4-FFF2-40B4-BE49-F238E27FC236}">
+                <a16:creationId xmlns:a16="http://schemas.microsoft.com/office/drawing/2014/main" id="{4CF35AC5-649F-B75B-95D9-5F651DF7CE34}"/>
+              </a:ext>
+            </a:extLst>
+          </p:cNvPr>
+          <p:cNvPicPr>
+            <a:picLocks noChangeAspect="1"/>
+          </p:cNvPicPr>
+          <p:nvPr/>
+        </p:nvPicPr>
+        <p:blipFill>
+          <a:blip r:embed="rId3"/>
+          <a:stretch>
+            <a:fillRect/>
+          </a:stretch>
+        </p:blipFill>
+        <p:spPr>
+          <a:xfrm>
+            <a:off x="5890662" y="3245953"/>
+            <a:ext cx="5229955" cy="2857899"/>
+          </a:xfrm>
+          <a:prstGeom prst="rect">
+            <a:avLst/>
+          </a:prstGeom>
+        </p:spPr>
+      </p:pic>
+    </p:spTree>
+    <p:extLst>
+      <p:ext uri="{BB962C8B-B14F-4D97-AF65-F5344CB8AC3E}">
+        <p14:creationId xmlns:p14="http://schemas.microsoft.com/office/powerpoint/2010/main" val="1560842493"/>
+      </p:ext>
+    </p:extLst>
+  </p:cSld>
+  <p:clrMapOvr>
+    <a:masterClrMapping/>
+  </p:clrMapOvr>
+</p:sld>
+</file>
+
+<file path=ppt/slides/slide9.xml><?xml version="1.0" encoding="utf-8"?>
+<p:sld xmlns:a="http://schemas.openxmlformats.org/drawingml/2006/main" xmlns:r="http://schemas.openxmlformats.org/officeDocument/2006/relationships" xmlns:p="http://schemas.openxmlformats.org/presentationml/2006/main">
+  <p:cSld>
+    <p:spTree>
+      <p:nvGrpSpPr>
+        <p:cNvPr id="1" name=""/>
+        <p:cNvGrpSpPr/>
+        <p:nvPr/>
+      </p:nvGrpSpPr>
+      <p:grpSpPr>
+        <a:xfrm>
+          <a:off x="0" y="0"/>
+          <a:ext cx="0" cy="0"/>
+          <a:chOff x="0" y="0"/>
+          <a:chExt cx="0" cy="0"/>
+        </a:xfrm>
+      </p:grpSpPr>
+      <p:sp>
+        <p:nvSpPr>
+          <p:cNvPr id="2" name="Title 1">
+            <a:extLst>
+              <a:ext uri="{FF2B5EF4-FFF2-40B4-BE49-F238E27FC236}">
+                <a16:creationId xmlns:a16="http://schemas.microsoft.com/office/drawing/2014/main" id="{528B9F04-3F4A-E9A4-6287-5886EF5412A9}"/>
+              </a:ext>
+            </a:extLst>
+          </p:cNvPr>
+          <p:cNvSpPr>
+            <a:spLocks noGrp="1"/>
+          </p:cNvSpPr>
+          <p:nvPr>
+            <p:ph type="title"/>
+          </p:nvPr>
+        </p:nvSpPr>
+        <p:spPr/>
+        <p:txBody>
+          <a:bodyPr/>
+          <a:lstStyle/>
+          <a:p>
+            <a:r>
+              <a:rPr lang="en-US" dirty="0"/>
+              <a:t>Statistical Modelling (On Course)</a:t>
+            </a:r>
+          </a:p>
+        </p:txBody>
+      </p:sp>
+      <p:sp>
+        <p:nvSpPr>
+          <p:cNvPr id="3" name="Content Placeholder 2">
+            <a:extLst>
+              <a:ext uri="{FF2B5EF4-FFF2-40B4-BE49-F238E27FC236}">
+                <a16:creationId xmlns:a16="http://schemas.microsoft.com/office/drawing/2014/main" id="{B5895856-7EEB-5A8E-8F5E-424159E970F8}"/>
+              </a:ext>
+            </a:extLst>
+          </p:cNvPr>
+          <p:cNvSpPr>
+            <a:spLocks noGrp="1"/>
+          </p:cNvSpPr>
+          <p:nvPr>
+            <p:ph idx="1"/>
+          </p:nvPr>
+        </p:nvSpPr>
+        <p:spPr>
+          <a:xfrm>
+            <a:off x="443755" y="1497366"/>
+            <a:ext cx="7852519" cy="2012421"/>
+          </a:xfrm>
+        </p:spPr>
+        <p:txBody>
+          <a:bodyPr/>
+          <a:lstStyle/>
+          <a:p>
+            <a:pPr algn="just"/>
+            <a:r>
+              <a:rPr lang="en-US" sz="1600" b="1" dirty="0"/>
+              <a:t>Demand Prediction: </a:t>
+            </a:r>
+            <a:r>
+              <a:rPr lang="en-US" sz="1600" dirty="0"/>
+              <a:t>After combining all the datasets and adjusting with population growth, we could have a good prediction of the Demand – </a:t>
+            </a:r>
+          </a:p>
+          <a:p>
+            <a:pPr algn="just"/>
+            <a:r>
+              <a:rPr lang="en-US" sz="1600" dirty="0"/>
+              <a:t>We used Multi Linear Model and obtained an Adjusted R</a:t>
+            </a:r>
+            <a:r>
+              <a:rPr lang="en-US" sz="1600" baseline="30000" dirty="0"/>
+              <a:t>2</a:t>
+            </a:r>
+            <a:r>
+              <a:rPr lang="en-US" sz="1600" dirty="0"/>
+              <a:t> of 0.699.</a:t>
+            </a:r>
+            <a:endParaRPr lang="en-US" sz="1600" b="1" dirty="0"/>
+          </a:p>
+        </p:txBody>
+      </p:sp>
+      <p:sp>
+        <p:nvSpPr>
+          <p:cNvPr id="4" name="Slide Number Placeholder 3">
+            <a:extLst>
+              <a:ext uri="{FF2B5EF4-FFF2-40B4-BE49-F238E27FC236}">
+                <a16:creationId xmlns:a16="http://schemas.microsoft.com/office/drawing/2014/main" id="{A23862DE-0874-F1E7-ED0F-E09754AE3C2D}"/>
+              </a:ext>
+            </a:extLst>
+          </p:cNvPr>
+          <p:cNvSpPr>
+            <a:spLocks noGrp="1"/>
+          </p:cNvSpPr>
+          <p:nvPr>
+            <p:ph type="sldNum" sz="quarter" idx="12"/>
+          </p:nvPr>
+        </p:nvSpPr>
+        <p:spPr/>
+        <p:txBody>
+          <a:bodyPr/>
+          <a:lstStyle/>
+          <a:p>
+            <a:fld id="{5C35FCF4-C3EF-BD43-82E0-05BC237DAD2A}" type="slidenum">
+              <a:rPr lang="en-US" smtClean="0"/>
+              <a:pPr/>
+              <a:t>9</a:t>
+            </a:fld>
+            <a:endParaRPr lang="en-US" dirty="0"/>
+          </a:p>
+        </p:txBody>
+      </p:sp>
+      <p:pic>
+        <p:nvPicPr>
+          <p:cNvPr id="6" name="Picture 5">
+            <a:extLst>
+              <a:ext uri="{FF2B5EF4-FFF2-40B4-BE49-F238E27FC236}">
+                <a16:creationId xmlns:a16="http://schemas.microsoft.com/office/drawing/2014/main" id="{B9C26AC8-8C0C-EFFC-F555-F0D91D403A2E}"/>
+              </a:ext>
+            </a:extLst>
+          </p:cNvPr>
+          <p:cNvPicPr>
+            <a:picLocks noChangeAspect="1"/>
+          </p:cNvPicPr>
+          <p:nvPr/>
+        </p:nvPicPr>
+        <p:blipFill>
+          <a:blip r:embed="rId2"/>
+          <a:stretch>
+            <a:fillRect/>
+          </a:stretch>
+        </p:blipFill>
+        <p:spPr>
+          <a:xfrm>
+            <a:off x="295928" y="2683697"/>
+            <a:ext cx="5396667" cy="2676937"/>
+          </a:xfrm>
+          <a:prstGeom prst="rect">
+            <a:avLst/>
+          </a:prstGeom>
+        </p:spPr>
+      </p:pic>
+      <p:pic>
+        <p:nvPicPr>
+          <p:cNvPr id="10" name="Picture 9">
+            <a:extLst>
+              <a:ext uri="{FF2B5EF4-FFF2-40B4-BE49-F238E27FC236}">
+                <a16:creationId xmlns:a16="http://schemas.microsoft.com/office/drawing/2014/main" id="{994D7A1D-B3B1-6846-05E8-69372A46025A}"/>
+              </a:ext>
+            </a:extLst>
+          </p:cNvPr>
+          <p:cNvPicPr>
+            <a:picLocks noChangeAspect="1"/>
+          </p:cNvPicPr>
+          <p:nvPr/>
+        </p:nvPicPr>
+        <p:blipFill>
+          <a:blip r:embed="rId3"/>
+          <a:stretch>
+            <a:fillRect/>
+          </a:stretch>
+        </p:blipFill>
+        <p:spPr>
+          <a:xfrm>
+            <a:off x="5949586" y="2681442"/>
+            <a:ext cx="5527386" cy="2679192"/>
+          </a:xfrm>
+          <a:prstGeom prst="rect">
+            <a:avLst/>
+          </a:prstGeom>
+        </p:spPr>
+      </p:pic>
+    </p:spTree>
+    <p:extLst>
+      <p:ext uri="{BB962C8B-B14F-4D97-AF65-F5344CB8AC3E}">
+        <p14:creationId xmlns:p14="http://schemas.microsoft.com/office/powerpoint/2010/main" val="4084291619"/>
       </p:ext>
     </p:extLst>
   </p:cSld>
@@ -10937,6 +11442,38 @@
 </file>
 
 <file path=customXml/item1.xml><?xml version="1.0" encoding="utf-8"?>
+<p:properties xmlns:p="http://schemas.microsoft.com/office/2006/metadata/properties" xmlns:xsi="http://www.w3.org/2001/XMLSchema-instance" xmlns:pc="http://schemas.microsoft.com/office/infopath/2007/PartnerControls">
+  <documentManagement>
+    <SharedWithUsers xmlns="7a4191d5-9b76-4ae3-8401-87ceee92a846">
+      <UserInfo>
+        <DisplayName>Office Of Advancement Visitors</DisplayName>
+        <AccountId>4</AccountId>
+        <AccountType/>
+      </UserInfo>
+      <UserInfo>
+        <DisplayName>UCalgary Brand</DisplayName>
+        <AccountId>15</AccountId>
+        <AccountType/>
+      </UserInfo>
+    </SharedWithUsers>
+    <TaxCatchAll xmlns="7a4191d5-9b76-4ae3-8401-87ceee92a846" xsi:nil="true"/>
+    <lcf76f155ced4ddcb4097134ff3c332f xmlns="b9b0194d-1e98-4efc-bad5-9450f4bf7a13">
+      <Terms xmlns="http://schemas.microsoft.com/office/infopath/2007/PartnerControls"/>
+    </lcf76f155ced4ddcb4097134ff3c332f>
+  </documentManagement>
+</p:properties>
+</file>
+
+<file path=customXml/item2.xml><?xml version="1.0" encoding="utf-8"?>
+<?mso-contentType ?>
+<FormTemplates xmlns="http://schemas.microsoft.com/sharepoint/v3/contenttype/forms">
+  <Display>DocumentLibraryForm</Display>
+  <Edit>DocumentLibraryForm</Edit>
+  <New>DocumentLibraryForm</New>
+</FormTemplates>
+</file>
+
+<file path=customXml/item3.xml><?xml version="1.0" encoding="utf-8"?>
 <ct:contentTypeSchema xmlns:ct="http://schemas.microsoft.com/office/2006/metadata/contentType" xmlns:ma="http://schemas.microsoft.com/office/2006/metadata/properties/metaAttributes" ct:_="" ma:_="" ma:contentTypeName="Document" ma:contentTypeID="0x010100A14D9A0FA515564792FEACC70AB1043E" ma:contentTypeVersion="15" ma:contentTypeDescription="Create a new document." ma:contentTypeScope="" ma:versionID="3387522b3212352fc6bbea455d3cfc53">
   <xsd:schema xmlns:xsd="http://www.w3.org/2001/XMLSchema" xmlns:xs="http://www.w3.org/2001/XMLSchema" xmlns:p="http://schemas.microsoft.com/office/2006/metadata/properties" xmlns:ns2="7a4191d5-9b76-4ae3-8401-87ceee92a846" xmlns:ns3="b9b0194d-1e98-4efc-bad5-9450f4bf7a13" targetNamespace="http://schemas.microsoft.com/office/2006/metadata/properties" ma:root="true" ma:fieldsID="e28e2b4de73025e43726d49ef756c6aa" ns2:_="" ns3:_="">
     <xsd:import namespace="7a4191d5-9b76-4ae3-8401-87ceee92a846"/>
@@ -11159,39 +11696,26 @@
 </ct:contentTypeSchema>
 </file>
 
-<file path=customXml/item2.xml><?xml version="1.0" encoding="utf-8"?>
-<p:properties xmlns:p="http://schemas.microsoft.com/office/2006/metadata/properties" xmlns:xsi="http://www.w3.org/2001/XMLSchema-instance" xmlns:pc="http://schemas.microsoft.com/office/infopath/2007/PartnerControls">
-  <documentManagement>
-    <SharedWithUsers xmlns="7a4191d5-9b76-4ae3-8401-87ceee92a846">
-      <UserInfo>
-        <DisplayName>Office Of Advancement Visitors</DisplayName>
-        <AccountId>4</AccountId>
-        <AccountType/>
-      </UserInfo>
-      <UserInfo>
-        <DisplayName>UCalgary Brand</DisplayName>
-        <AccountId>15</AccountId>
-        <AccountType/>
-      </UserInfo>
-    </SharedWithUsers>
-    <TaxCatchAll xmlns="7a4191d5-9b76-4ae3-8401-87ceee92a846" xsi:nil="true"/>
-    <lcf76f155ced4ddcb4097134ff3c332f xmlns="b9b0194d-1e98-4efc-bad5-9450f4bf7a13">
-      <Terms xmlns="http://schemas.microsoft.com/office/infopath/2007/PartnerControls"/>
-    </lcf76f155ced4ddcb4097134ff3c332f>
-  </documentManagement>
-</p:properties>
+<file path=customXml/itemProps1.xml><?xml version="1.0" encoding="utf-8"?>
+<ds:datastoreItem xmlns:ds="http://schemas.openxmlformats.org/officeDocument/2006/customXml" ds:itemID="{836ABDF2-BD05-4010-80BA-3DB41DBF8678}">
+  <ds:schemaRefs>
+    <ds:schemaRef ds:uri="http://schemas.microsoft.com/office/2006/metadata/properties"/>
+    <ds:schemaRef ds:uri="http://schemas.microsoft.com/office/infopath/2007/PartnerControls"/>
+    <ds:schemaRef ds:uri="7a4191d5-9b76-4ae3-8401-87ceee92a846"/>
+    <ds:schemaRef ds:uri="b9b0194d-1e98-4efc-bad5-9450f4bf7a13"/>
+  </ds:schemaRefs>
+</ds:datastoreItem>
 </file>
 
-<file path=customXml/item3.xml><?xml version="1.0" encoding="utf-8"?>
-<?mso-contentType ?>
-<FormTemplates xmlns="http://schemas.microsoft.com/sharepoint/v3/contenttype/forms">
-  <Display>DocumentLibraryForm</Display>
-  <Edit>DocumentLibraryForm</Edit>
-  <New>DocumentLibraryForm</New>
-</FormTemplates>
+<file path=customXml/itemProps2.xml><?xml version="1.0" encoding="utf-8"?>
+<ds:datastoreItem xmlns:ds="http://schemas.openxmlformats.org/officeDocument/2006/customXml" ds:itemID="{B1379BBF-6672-4ABD-B16E-D222A38B6B94}">
+  <ds:schemaRefs>
+    <ds:schemaRef ds:uri="http://schemas.microsoft.com/sharepoint/v3/contenttype/forms"/>
+  </ds:schemaRefs>
+</ds:datastoreItem>
 </file>
 
-<file path=customXml/itemProps1.xml><?xml version="1.0" encoding="utf-8"?>
+<file path=customXml/itemProps3.xml><?xml version="1.0" encoding="utf-8"?>
 <ds:datastoreItem xmlns:ds="http://schemas.openxmlformats.org/officeDocument/2006/customXml" ds:itemID="{88FE4E6F-A4E5-40F2-8CE2-36663D7A069E}">
   <ds:schemaRefs>
     <ds:schemaRef ds:uri="http://schemas.microsoft.com/office/2006/metadata/contentType"/>
@@ -11208,23 +11732,4 @@
     <ds:schemaRef ds:uri="http://schemas.microsoft.com/internal/obd"/>
   </ds:schemaRefs>
 </ds:datastoreItem>
-</file>
-
-<file path=customXml/itemProps2.xml><?xml version="1.0" encoding="utf-8"?>
-<ds:datastoreItem xmlns:ds="http://schemas.openxmlformats.org/officeDocument/2006/customXml" ds:itemID="{836ABDF2-BD05-4010-80BA-3DB41DBF8678}">
-  <ds:schemaRefs>
-    <ds:schemaRef ds:uri="http://schemas.microsoft.com/office/2006/metadata/properties"/>
-    <ds:schemaRef ds:uri="http://schemas.microsoft.com/office/infopath/2007/PartnerControls"/>
-    <ds:schemaRef ds:uri="7a4191d5-9b76-4ae3-8401-87ceee92a846"/>
-    <ds:schemaRef ds:uri="b9b0194d-1e98-4efc-bad5-9450f4bf7a13"/>
-  </ds:schemaRefs>
-</ds:datastoreItem>
-</file>
-
-<file path=customXml/itemProps3.xml><?xml version="1.0" encoding="utf-8"?>
-<ds:datastoreItem xmlns:ds="http://schemas.openxmlformats.org/officeDocument/2006/customXml" ds:itemID="{B1379BBF-6672-4ABD-B16E-D222A38B6B94}">
-  <ds:schemaRefs>
-    <ds:schemaRef ds:uri="http://schemas.microsoft.com/sharepoint/v3/contenttype/forms"/>
-  </ds:schemaRefs>
-</ds:datastoreItem>
 </file>